--- a/Marketing/CLM-Executive-Briefing.pptx
+++ b/Marketing/CLM-Executive-Briefing.pptx
@@ -143,7 +143,7 @@
             <c:idx val="0"/>
             <c:spPr>
               <a:solidFill>
-                <a:srgbClr val="B9C0CB"/>
+                <a:srgbClr val="4D5F7A"/>
               </a:solidFill>
             </c:spPr>
           </c:dPt>
@@ -151,7 +151,7 @@
             <c:idx val="1"/>
             <c:spPr>
               <a:solidFill>
-                <a:srgbClr val="B9C0CB"/>
+                <a:srgbClr val="4D5F7A"/>
               </a:solidFill>
             </c:spPr>
           </c:dPt>
@@ -159,7 +159,7 @@
             <c:idx val="2"/>
             <c:spPr>
               <a:solidFill>
-                <a:srgbClr val="0F7B6C"/>
+                <a:srgbClr val="2CC5AD"/>
               </a:solidFill>
             </c:spPr>
           </c:dPt>
@@ -206,7 +206,11 @@
             <a:lstStyle/>
             <a:p>
               <a:pPr>
-                <a:defRPr sz="1600" b="1"/>
+                <a:defRPr sz="1600" b="1">
+                  <a:solidFill>
+                    <a:srgbClr val="F3F6FA"/>
+                  </a:solidFill>
+                </a:defRPr>
               </a:pPr>
             </a:p>
           </c:txPr>
@@ -233,12 +237,22 @@
         <c:majorTickMark val="out"/>
         <c:minorTickMark val="none"/>
         <c:tickLblPos val="nextTo"/>
+        <c:spPr>
+          <a:ln>
+            <a:solidFill>
+              <a:srgbClr val="4D5F7A"/>
+            </a:solidFill>
+          </a:ln>
+        </c:spPr>
         <c:txPr>
           <a:bodyPr/>
           <a:lstStyle/>
           <a:p>
             <a:pPr>
               <a:defRPr sz="1600">
+                <a:solidFill>
+                  <a:srgbClr val="F3F6FA"/>
+                </a:solidFill>
                 <a:latin typeface="Calibri"/>
               </a:defRPr>
             </a:pPr>
@@ -311,7 +325,7 @@
             <c:idx val="0"/>
             <c:spPr>
               <a:solidFill>
-                <a:srgbClr val="D9622B"/>
+                <a:srgbClr val="F0A04B"/>
               </a:solidFill>
             </c:spPr>
           </c:dPt>
@@ -319,7 +333,7 @@
             <c:idx val="1"/>
             <c:spPr>
               <a:solidFill>
-                <a:srgbClr val="B9C0CB"/>
+                <a:srgbClr val="4D5F7A"/>
               </a:solidFill>
             </c:spPr>
           </c:dPt>
@@ -327,7 +341,7 @@
             <c:idx val="2"/>
             <c:spPr>
               <a:solidFill>
-                <a:srgbClr val="B9C0CB"/>
+                <a:srgbClr val="4D5F7A"/>
               </a:solidFill>
             </c:spPr>
           </c:dPt>
@@ -335,7 +349,7 @@
             <c:idx val="3"/>
             <c:spPr>
               <a:solidFill>
-                <a:srgbClr val="0F7B6C"/>
+                <a:srgbClr val="2CC5AD"/>
               </a:solidFill>
             </c:spPr>
           </c:dPt>
@@ -388,7 +402,11 @@
             <a:lstStyle/>
             <a:p>
               <a:pPr>
-                <a:defRPr sz="1600" b="1"/>
+                <a:defRPr sz="1600" b="1">
+                  <a:solidFill>
+                    <a:srgbClr val="F3F6FA"/>
+                  </a:solidFill>
+                </a:defRPr>
               </a:pPr>
             </a:p>
           </c:txPr>
@@ -415,12 +433,22 @@
         <c:majorTickMark val="out"/>
         <c:minorTickMark val="none"/>
         <c:tickLblPos val="nextTo"/>
+        <c:spPr>
+          <a:ln>
+            <a:solidFill>
+              <a:srgbClr val="4D5F7A"/>
+            </a:solidFill>
+          </a:ln>
+        </c:spPr>
         <c:txPr>
           <a:bodyPr/>
           <a:lstStyle/>
           <a:p>
             <a:pPr>
               <a:defRPr sz="1600">
+                <a:solidFill>
+                  <a:srgbClr val="F3F6FA"/>
+                </a:solidFill>
                 <a:latin typeface="Calibri"/>
               </a:defRPr>
             </a:pPr>
@@ -1001,7 +1029,7 @@
           <a:lstStyle/>
           <a:p>
             <a:r>
-              <a:t>Classification at volume is millions of short, repetitive decisions with fixed labels and plenty of past examples. What matters is speed, cost per decision, privacy and consistency. A frontier model is a brilliant generalist, but we pay per token, and every request leaves the building.</a:t>
+              <a:t>Classification at volume is millions of short, repetitive decisions with fixed labels and past examples. What matters is speed, cost per decision, privacy and consistency. A frontier model is a brilliant generalist, but we pay per token, and every request leaves the building.</a:t>
             </a:r>
           </a:p>
         </p:txBody>
@@ -1351,7 +1379,7 @@
           <a:lstStyle/>
           <a:p>
             <a:r>
-              <a:t>It stays ours. Texts never leave our machines, the same input gives the same answer, and model files are versioned and verified, with a full governance pack in the repository.</a:t>
+              <a:t>It stays ours. Texts never leave our machines, the same input gives the same answer, and every model is a verified file we can export to disk or S3, with a governance pack in the repository.</a:t>
             </a:r>
           </a:p>
         </p:txBody>
@@ -1491,7 +1519,7 @@
           <a:lstStyle/>
           <a:p>
             <a:r>
-              <a:t>Getting started is small: a few hundred labelled examples, minutes of training in a browser, and a laptop or small server. Before real decisions, people check the labels, the probabilities are calibrated, and the governance checklist is signed off.</a:t>
+              <a:t>Getting started is small: a few hundred labelled examples, minutes of training in a browser, a laptop or small server. Before real decisions: checked labels, calibrated probabilities, and the governance checklist signed off.</a:t>
             </a:r>
           </a:p>
         </p:txBody>
@@ -4506,13 +4534,13 @@
         <p:spPr>
           <a:xfrm>
             <a:off x="0" y="0"/>
-            <a:ext cx="109728" cy="6858000"/>
+            <a:ext cx="12191695" cy="6858000"/>
           </a:xfrm>
           <a:prstGeom prst="rect">
             <a:avLst/>
           </a:prstGeom>
           <a:solidFill>
-            <a:srgbClr val="0F7B6C"/>
+            <a:srgbClr val="0C1A30"/>
           </a:solidFill>
           <a:ln>
             <a:noFill/>
@@ -4542,13 +4570,56 @@
       </p:sp>
       <p:sp>
         <p:nvSpPr>
-          <p:cNvPr id="3" name="TextBox 2"/>
+          <p:cNvPr id="3" name="Rectangle 2"/>
+          <p:cNvSpPr/>
+          <p:nvPr/>
+        </p:nvSpPr>
+        <p:spPr>
+          <a:xfrm>
+            <a:off x="731520" y="658368"/>
+            <a:ext cx="320040" cy="36576"/>
+          </a:xfrm>
+          <a:prstGeom prst="rect">
+            <a:avLst/>
+          </a:prstGeom>
+          <a:solidFill>
+            <a:srgbClr val="2CC5AD"/>
+          </a:solidFill>
+          <a:ln>
+            <a:noFill/>
+          </a:ln>
+        </p:spPr>
+        <p:style>
+          <a:lnRef idx="1">
+            <a:schemeClr val="accent1"/>
+          </a:lnRef>
+          <a:fillRef idx="3">
+            <a:schemeClr val="accent1"/>
+          </a:fillRef>
+          <a:effectRef idx="2">
+            <a:schemeClr val="accent1"/>
+          </a:effectRef>
+          <a:fontRef idx="minor">
+            <a:schemeClr val="lt1"/>
+          </a:fontRef>
+        </p:style>
+        <p:txBody>
+          <a:bodyPr rtlCol="0" anchor="ctr"/>
+          <a:lstStyle/>
+          <a:p>
+            <a:pPr algn="ctr"/>
+          </a:p>
+        </p:txBody>
+      </p:sp>
+      <p:sp>
+        <p:nvSpPr>
+          <p:cNvPr id="4" name="TextBox 3"/>
           <p:cNvSpPr txBox="1"/>
           <p:nvPr/>
         </p:nvSpPr>
         <p:spPr>
           <a:xfrm>
-            <a:off x="731520" y="502920"/>
+            <a:off x="1143000" y="502920"/>
             <a:ext cx="8229600" cy="365760"/>
           </a:xfrm>
           <a:prstGeom prst="rect">
@@ -4565,18 +4636,18 @@
             <a:r>
               <a:rPr sz="1300" b="1">
                 <a:solidFill>
-                  <a:srgbClr val="0F7B6C"/>
+                  <a:srgbClr val="2CC5AD"/>
                 </a:solidFill>
                 <a:latin typeface="Calibri"/>
               </a:rPr>
-              <a:t>EXECUTIVE BRIEFING</a:t>
-            </a:r>
-          </a:p>
-        </p:txBody>
-      </p:sp>
-      <p:sp>
-        <p:nvSpPr>
-          <p:cNvPr id="4" name="TextBox 3"/>
+              <a:t>EXECUTIVE BRIEFING · OCTOBER 2026</a:t>
+            </a:r>
+          </a:p>
+        </p:txBody>
+      </p:sp>
+      <p:sp>
+        <p:nvSpPr>
+          <p:cNvPr id="5" name="TextBox 4"/>
           <p:cNvSpPr txBox="1"/>
           <p:nvPr/>
         </p:nvSpPr>
@@ -4599,7 +4670,7 @@
             <a:r>
               <a:rPr sz="1600" b="1">
                 <a:solidFill>
-                  <a:srgbClr val="0F7B6C"/>
+                  <a:srgbClr val="F3F6FA"/>
                 </a:solidFill>
                 <a:latin typeface="Calibri"/>
               </a:rPr>
@@ -4610,7 +4681,7 @@
       </p:sp>
       <p:sp>
         <p:nvSpPr>
-          <p:cNvPr id="5" name="TextBox 4"/>
+          <p:cNvPr id="6" name="TextBox 5"/>
           <p:cNvSpPr txBox="1"/>
           <p:nvPr/>
         </p:nvSpPr>
@@ -4633,7 +4704,7 @@
             <a:r>
               <a:rPr sz="5400" b="1">
                 <a:solidFill>
-                  <a:srgbClr val="10213A"/>
+                  <a:srgbClr val="F3F6FA"/>
                 </a:solidFill>
                 <a:latin typeface="Calibri"/>
               </a:rPr>
@@ -4644,7 +4715,7 @@
       </p:sp>
       <p:sp>
         <p:nvSpPr>
-          <p:cNvPr id="6" name="TextBox 5"/>
+          <p:cNvPr id="7" name="TextBox 6"/>
           <p:cNvSpPr txBox="1"/>
           <p:nvPr/>
         </p:nvSpPr>
@@ -4667,7 +4738,7 @@
             <a:r>
               <a:rPr sz="2400" b="0">
                 <a:solidFill>
-                  <a:srgbClr val="5A6476"/>
+                  <a:srgbClr val="A9B6C8"/>
                 </a:solidFill>
                 <a:latin typeface="Calibri"/>
               </a:rPr>
@@ -4703,13 +4774,13 @@
         <p:spPr>
           <a:xfrm>
             <a:off x="0" y="0"/>
-            <a:ext cx="109728" cy="6858000"/>
+            <a:ext cx="12191695" cy="6858000"/>
           </a:xfrm>
           <a:prstGeom prst="rect">
             <a:avLst/>
           </a:prstGeom>
           <a:solidFill>
-            <a:srgbClr val="0F7B6C"/>
+            <a:srgbClr val="0C1A30"/>
           </a:solidFill>
           <a:ln>
             <a:noFill/>
@@ -4739,13 +4810,56 @@
       </p:sp>
       <p:sp>
         <p:nvSpPr>
-          <p:cNvPr id="3" name="TextBox 2"/>
+          <p:cNvPr id="3" name="Rectangle 2"/>
+          <p:cNvSpPr/>
+          <p:nvPr/>
+        </p:nvSpPr>
+        <p:spPr>
+          <a:xfrm>
+            <a:off x="731520" y="658368"/>
+            <a:ext cx="320040" cy="36576"/>
+          </a:xfrm>
+          <a:prstGeom prst="rect">
+            <a:avLst/>
+          </a:prstGeom>
+          <a:solidFill>
+            <a:srgbClr val="2CC5AD"/>
+          </a:solidFill>
+          <a:ln>
+            <a:noFill/>
+          </a:ln>
+        </p:spPr>
+        <p:style>
+          <a:lnRef idx="1">
+            <a:schemeClr val="accent1"/>
+          </a:lnRef>
+          <a:fillRef idx="3">
+            <a:schemeClr val="accent1"/>
+          </a:fillRef>
+          <a:effectRef idx="2">
+            <a:schemeClr val="accent1"/>
+          </a:effectRef>
+          <a:fontRef idx="minor">
+            <a:schemeClr val="lt1"/>
+          </a:fontRef>
+        </p:style>
+        <p:txBody>
+          <a:bodyPr rtlCol="0" anchor="ctr"/>
+          <a:lstStyle/>
+          <a:p>
+            <a:pPr algn="ctr"/>
+          </a:p>
+        </p:txBody>
+      </p:sp>
+      <p:sp>
+        <p:nvSpPr>
+          <p:cNvPr id="4" name="TextBox 3"/>
           <p:cNvSpPr txBox="1"/>
           <p:nvPr/>
         </p:nvSpPr>
         <p:spPr>
           <a:xfrm>
-            <a:off x="731520" y="502920"/>
+            <a:off x="1143000" y="502920"/>
             <a:ext cx="8229600" cy="365760"/>
           </a:xfrm>
           <a:prstGeom prst="rect">
@@ -4762,7 +4876,7 @@
             <a:r>
               <a:rPr sz="1300" b="1">
                 <a:solidFill>
-                  <a:srgbClr val="0F7B6C"/>
+                  <a:srgbClr val="2CC5AD"/>
                 </a:solidFill>
                 <a:latin typeface="Calibri"/>
               </a:rPr>
@@ -4773,7 +4887,7 @@
       </p:sp>
       <p:sp>
         <p:nvSpPr>
-          <p:cNvPr id="4" name="TextBox 3"/>
+          <p:cNvPr id="5" name="TextBox 4"/>
           <p:cNvSpPr txBox="1"/>
           <p:nvPr/>
         </p:nvSpPr>
@@ -4796,7 +4910,7 @@
             <a:r>
               <a:rPr sz="1600" b="1">
                 <a:solidFill>
-                  <a:srgbClr val="0F7B6C"/>
+                  <a:srgbClr val="F3F6FA"/>
                 </a:solidFill>
                 <a:latin typeface="Calibri"/>
               </a:rPr>
@@ -4807,14 +4921,14 @@
       </p:sp>
       <p:sp>
         <p:nvSpPr>
-          <p:cNvPr id="5" name="TextBox 4"/>
+          <p:cNvPr id="6" name="TextBox 5"/>
           <p:cNvSpPr txBox="1"/>
           <p:nvPr/>
         </p:nvSpPr>
         <p:spPr>
           <a:xfrm>
-            <a:off x="731520" y="914400"/>
-            <a:ext cx="10515600" cy="1463040"/>
+            <a:off x="731520" y="6355080"/>
+            <a:ext cx="1828800" cy="274320"/>
           </a:xfrm>
           <a:prstGeom prst="rect">
             <a:avLst/>
@@ -4828,9 +4942,43 @@
           <a:lstStyle/>
           <a:p>
             <a:r>
+              <a:rPr sz="900" b="0">
+                <a:solidFill>
+                  <a:srgbClr val="4D5F7A"/>
+                </a:solidFill>
+                <a:latin typeface="Calibri"/>
+              </a:rPr>
+              <a:t>10 / 10</a:t>
+            </a:r>
+          </a:p>
+        </p:txBody>
+      </p:sp>
+      <p:sp>
+        <p:nvSpPr>
+          <p:cNvPr id="7" name="TextBox 6"/>
+          <p:cNvSpPr txBox="1"/>
+          <p:nvPr/>
+        </p:nvSpPr>
+        <p:spPr>
+          <a:xfrm>
+            <a:off x="731520" y="914400"/>
+            <a:ext cx="10515600" cy="1463040"/>
+          </a:xfrm>
+          <a:prstGeom prst="rect">
+            <a:avLst/>
+          </a:prstGeom>
+          <a:noFill/>
+        </p:spPr>
+        <p:txBody>
+          <a:bodyPr wrap="square">
+            <a:spAutoFit/>
+          </a:bodyPr>
+          <a:lstStyle/>
+          <a:p>
+            <a:r>
               <a:rPr sz="4000" b="1">
                 <a:solidFill>
-                  <a:srgbClr val="10213A"/>
+                  <a:srgbClr val="F3F6FA"/>
                 </a:solidFill>
                 <a:latin typeface="Calibri"/>
               </a:rPr>
@@ -4841,7 +4989,7 @@
       </p:sp>
       <p:sp>
         <p:nvSpPr>
-          <p:cNvPr id="6" name="TextBox 5"/>
+          <p:cNvPr id="8" name="TextBox 7"/>
           <p:cNvSpPr txBox="1"/>
           <p:nvPr/>
         </p:nvSpPr>
@@ -4864,7 +5012,7 @@
             <a:r>
               <a:rPr sz="2400" b="0">
                 <a:solidFill>
-                  <a:srgbClr val="10213A"/>
+                  <a:srgbClr val="F3F6FA"/>
                 </a:solidFill>
                 <a:latin typeface="Calibri"/>
               </a:rPr>
@@ -4880,7 +5028,7 @@
             <a:r>
               <a:rPr sz="2400">
                 <a:solidFill>
-                  <a:srgbClr val="10213A"/>
+                  <a:srgbClr val="F3F6FA"/>
                 </a:solidFill>
                 <a:latin typeface="Calibri"/>
               </a:rPr>
@@ -4896,7 +5044,7 @@
             <a:r>
               <a:rPr sz="2400">
                 <a:solidFill>
-                  <a:srgbClr val="10213A"/>
+                  <a:srgbClr val="F3F6FA"/>
                 </a:solidFill>
                 <a:latin typeface="Calibri"/>
               </a:rPr>
@@ -4912,7 +5060,7 @@
             <a:r>
               <a:rPr sz="2400">
                 <a:solidFill>
-                  <a:srgbClr val="10213A"/>
+                  <a:srgbClr val="F3F6FA"/>
                 </a:solidFill>
                 <a:latin typeface="Calibri"/>
               </a:rPr>
@@ -4948,13 +5096,13 @@
         <p:spPr>
           <a:xfrm>
             <a:off x="0" y="0"/>
-            <a:ext cx="109728" cy="6858000"/>
+            <a:ext cx="12191695" cy="6858000"/>
           </a:xfrm>
           <a:prstGeom prst="rect">
             <a:avLst/>
           </a:prstGeom>
           <a:solidFill>
-            <a:srgbClr val="0F7B6C"/>
+            <a:srgbClr val="0C1A30"/>
           </a:solidFill>
           <a:ln>
             <a:noFill/>
@@ -4984,13 +5132,56 @@
       </p:sp>
       <p:sp>
         <p:nvSpPr>
-          <p:cNvPr id="3" name="TextBox 2"/>
+          <p:cNvPr id="3" name="Rectangle 2"/>
+          <p:cNvSpPr/>
+          <p:nvPr/>
+        </p:nvSpPr>
+        <p:spPr>
+          <a:xfrm>
+            <a:off x="731520" y="658368"/>
+            <a:ext cx="320040" cy="36576"/>
+          </a:xfrm>
+          <a:prstGeom prst="rect">
+            <a:avLst/>
+          </a:prstGeom>
+          <a:solidFill>
+            <a:srgbClr val="2CC5AD"/>
+          </a:solidFill>
+          <a:ln>
+            <a:noFill/>
+          </a:ln>
+        </p:spPr>
+        <p:style>
+          <a:lnRef idx="1">
+            <a:schemeClr val="accent1"/>
+          </a:lnRef>
+          <a:fillRef idx="3">
+            <a:schemeClr val="accent1"/>
+          </a:fillRef>
+          <a:effectRef idx="2">
+            <a:schemeClr val="accent1"/>
+          </a:effectRef>
+          <a:fontRef idx="minor">
+            <a:schemeClr val="lt1"/>
+          </a:fontRef>
+        </p:style>
+        <p:txBody>
+          <a:bodyPr rtlCol="0" anchor="ctr"/>
+          <a:lstStyle/>
+          <a:p>
+            <a:pPr algn="ctr"/>
+          </a:p>
+        </p:txBody>
+      </p:sp>
+      <p:sp>
+        <p:nvSpPr>
+          <p:cNvPr id="4" name="TextBox 3"/>
           <p:cNvSpPr txBox="1"/>
           <p:nvPr/>
         </p:nvSpPr>
         <p:spPr>
           <a:xfrm>
-            <a:off x="731520" y="502920"/>
+            <a:off x="1143000" y="502920"/>
             <a:ext cx="8229600" cy="365760"/>
           </a:xfrm>
           <a:prstGeom prst="rect">
@@ -5007,7 +5198,7 @@
             <a:r>
               <a:rPr sz="1300" b="1">
                 <a:solidFill>
-                  <a:srgbClr val="0F7B6C"/>
+                  <a:srgbClr val="2CC5AD"/>
                 </a:solidFill>
                 <a:latin typeface="Calibri"/>
               </a:rPr>
@@ -5018,7 +5209,7 @@
       </p:sp>
       <p:sp>
         <p:nvSpPr>
-          <p:cNvPr id="4" name="TextBox 3"/>
+          <p:cNvPr id="5" name="TextBox 4"/>
           <p:cNvSpPr txBox="1"/>
           <p:nvPr/>
         </p:nvSpPr>
@@ -5041,7 +5232,7 @@
             <a:r>
               <a:rPr sz="1600" b="1">
                 <a:solidFill>
-                  <a:srgbClr val="0F7B6C"/>
+                  <a:srgbClr val="F3F6FA"/>
                 </a:solidFill>
                 <a:latin typeface="Calibri"/>
               </a:rPr>
@@ -5052,14 +5243,14 @@
       </p:sp>
       <p:sp>
         <p:nvSpPr>
-          <p:cNvPr id="5" name="TextBox 4"/>
+          <p:cNvPr id="6" name="TextBox 5"/>
           <p:cNvSpPr txBox="1"/>
           <p:nvPr/>
         </p:nvSpPr>
         <p:spPr>
           <a:xfrm>
-            <a:off x="731520" y="914400"/>
-            <a:ext cx="10515600" cy="1463040"/>
+            <a:off x="731520" y="6355080"/>
+            <a:ext cx="1828800" cy="274320"/>
           </a:xfrm>
           <a:prstGeom prst="rect">
             <a:avLst/>
@@ -5073,9 +5264,43 @@
           <a:lstStyle/>
           <a:p>
             <a:r>
+              <a:rPr sz="900" b="0">
+                <a:solidFill>
+                  <a:srgbClr val="4D5F7A"/>
+                </a:solidFill>
+                <a:latin typeface="Calibri"/>
+              </a:rPr>
+              <a:t>02 / 10</a:t>
+            </a:r>
+          </a:p>
+        </p:txBody>
+      </p:sp>
+      <p:sp>
+        <p:nvSpPr>
+          <p:cNvPr id="7" name="TextBox 6"/>
+          <p:cNvSpPr txBox="1"/>
+          <p:nvPr/>
+        </p:nvSpPr>
+        <p:spPr>
+          <a:xfrm>
+            <a:off x="731520" y="914400"/>
+            <a:ext cx="10515600" cy="1463040"/>
+          </a:xfrm>
+          <a:prstGeom prst="rect">
+            <a:avLst/>
+          </a:prstGeom>
+          <a:noFill/>
+        </p:spPr>
+        <p:txBody>
+          <a:bodyPr wrap="square">
+            <a:spAutoFit/>
+          </a:bodyPr>
+          <a:lstStyle/>
+          <a:p>
+            <a:r>
               <a:rPr sz="4000" b="1">
                 <a:solidFill>
-                  <a:srgbClr val="10213A"/>
+                  <a:srgbClr val="F3F6FA"/>
                 </a:solidFill>
                 <a:latin typeface="Calibri"/>
               </a:rPr>
@@ -5086,7 +5311,7 @@
       </p:sp>
       <p:sp>
         <p:nvSpPr>
-          <p:cNvPr id="6" name="TextBox 5"/>
+          <p:cNvPr id="8" name="TextBox 7"/>
           <p:cNvSpPr txBox="1"/>
           <p:nvPr/>
         </p:nvSpPr>
@@ -5109,7 +5334,7 @@
             <a:r>
               <a:rPr sz="2400" b="0">
                 <a:solidFill>
-                  <a:srgbClr val="10213A"/>
+                  <a:srgbClr val="F3F6FA"/>
                 </a:solidFill>
                 <a:latin typeface="Calibri"/>
               </a:rPr>
@@ -5125,7 +5350,7 @@
             <a:r>
               <a:rPr sz="2400">
                 <a:solidFill>
-                  <a:srgbClr val="10213A"/>
+                  <a:srgbClr val="F3F6FA"/>
                 </a:solidFill>
                 <a:latin typeface="Calibri"/>
               </a:rPr>
@@ -5141,7 +5366,7 @@
             <a:r>
               <a:rPr sz="2400">
                 <a:solidFill>
-                  <a:srgbClr val="10213A"/>
+                  <a:srgbClr val="F3F6FA"/>
                 </a:solidFill>
                 <a:latin typeface="Calibri"/>
               </a:rPr>
@@ -5157,7 +5382,7 @@
             <a:r>
               <a:rPr sz="2400">
                 <a:solidFill>
-                  <a:srgbClr val="10213A"/>
+                  <a:srgbClr val="F3F6FA"/>
                 </a:solidFill>
                 <a:latin typeface="Calibri"/>
               </a:rPr>
@@ -5193,13 +5418,13 @@
         <p:spPr>
           <a:xfrm>
             <a:off x="0" y="0"/>
-            <a:ext cx="109728" cy="6858000"/>
+            <a:ext cx="12191695" cy="6858000"/>
           </a:xfrm>
           <a:prstGeom prst="rect">
             <a:avLst/>
           </a:prstGeom>
           <a:solidFill>
-            <a:srgbClr val="0F7B6C"/>
+            <a:srgbClr val="0C1A30"/>
           </a:solidFill>
           <a:ln>
             <a:noFill/>
@@ -5229,122 +5454,20 @@
       </p:sp>
       <p:sp>
         <p:nvSpPr>
-          <p:cNvPr id="3" name="TextBox 2"/>
-          <p:cNvSpPr txBox="1"/>
-          <p:nvPr/>
-        </p:nvSpPr>
-        <p:spPr>
-          <a:xfrm>
-            <a:off x="731520" y="502920"/>
-            <a:ext cx="8229600" cy="365760"/>
-          </a:xfrm>
-          <a:prstGeom prst="rect">
-            <a:avLst/>
-          </a:prstGeom>
-          <a:noFill/>
-        </p:spPr>
-        <p:txBody>
-          <a:bodyPr wrap="square">
-            <a:spAutoFit/>
-          </a:bodyPr>
-          <a:lstStyle/>
-          <a:p>
-            <a:r>
-              <a:rPr sz="1300" b="1">
-                <a:solidFill>
-                  <a:srgbClr val="0F7B6C"/>
-                </a:solidFill>
-                <a:latin typeface="Calibri"/>
-              </a:rPr>
-              <a:t>THE APPROACH</a:t>
-            </a:r>
-          </a:p>
-        </p:txBody>
-      </p:sp>
-      <p:sp>
-        <p:nvSpPr>
-          <p:cNvPr id="4" name="TextBox 3"/>
-          <p:cNvSpPr txBox="1"/>
-          <p:nvPr/>
-        </p:nvSpPr>
-        <p:spPr>
-          <a:xfrm>
-            <a:off x="10607040" y="502920"/>
-            <a:ext cx="1097280" cy="365760"/>
-          </a:xfrm>
-          <a:prstGeom prst="rect">
-            <a:avLst/>
-          </a:prstGeom>
-          <a:noFill/>
-        </p:spPr>
-        <p:txBody>
-          <a:bodyPr wrap="square">
-            <a:spAutoFit/>
-          </a:bodyPr>
-          <a:lstStyle/>
-          <a:p>
-            <a:r>
-              <a:rPr sz="1600" b="1">
-                <a:solidFill>
-                  <a:srgbClr val="0F7B6C"/>
-                </a:solidFill>
-                <a:latin typeface="Calibri"/>
-              </a:rPr>
-              <a:t>CLM</a:t>
-            </a:r>
-          </a:p>
-        </p:txBody>
-      </p:sp>
-      <p:sp>
-        <p:nvSpPr>
-          <p:cNvPr id="5" name="TextBox 4"/>
-          <p:cNvSpPr txBox="1"/>
-          <p:nvPr/>
-        </p:nvSpPr>
-        <p:spPr>
-          <a:xfrm>
-            <a:off x="731520" y="914400"/>
-            <a:ext cx="10515600" cy="1463040"/>
-          </a:xfrm>
-          <a:prstGeom prst="rect">
-            <a:avLst/>
-          </a:prstGeom>
-          <a:noFill/>
-        </p:spPr>
-        <p:txBody>
-          <a:bodyPr wrap="square">
-            <a:spAutoFit/>
-          </a:bodyPr>
-          <a:lstStyle/>
-          <a:p>
-            <a:r>
-              <a:rPr sz="4000" b="1">
-                <a:solidFill>
-                  <a:srgbClr val="10213A"/>
-                </a:solidFill>
-                <a:latin typeface="Calibri"/>
-              </a:rPr>
-              <a:t>A frozen reader, a small learner, one fast answer</a:t>
-            </a:r>
-          </a:p>
-        </p:txBody>
-      </p:sp>
-      <p:sp>
-        <p:nvSpPr>
-          <p:cNvPr id="6" name="Rectangle 5"/>
+          <p:cNvPr id="3" name="Rectangle 2"/>
           <p:cNvSpPr/>
           <p:nvPr/>
         </p:nvSpPr>
         <p:spPr>
           <a:xfrm>
-            <a:off x="731520" y="2240280"/>
-            <a:ext cx="3291840" cy="54864"/>
+            <a:off x="731520" y="658368"/>
+            <a:ext cx="320040" cy="36576"/>
           </a:xfrm>
           <a:prstGeom prst="rect">
             <a:avLst/>
           </a:prstGeom>
           <a:solidFill>
-            <a:srgbClr val="0F7B6C"/>
+            <a:srgbClr val="2CC5AD"/>
           </a:solidFill>
           <a:ln>
             <a:noFill/>
@@ -5374,14 +5497,116 @@
       </p:sp>
       <p:sp>
         <p:nvSpPr>
+          <p:cNvPr id="4" name="TextBox 3"/>
+          <p:cNvSpPr txBox="1"/>
+          <p:nvPr/>
+        </p:nvSpPr>
+        <p:spPr>
+          <a:xfrm>
+            <a:off x="1143000" y="502920"/>
+            <a:ext cx="8229600" cy="365760"/>
+          </a:xfrm>
+          <a:prstGeom prst="rect">
+            <a:avLst/>
+          </a:prstGeom>
+          <a:noFill/>
+        </p:spPr>
+        <p:txBody>
+          <a:bodyPr wrap="square">
+            <a:spAutoFit/>
+          </a:bodyPr>
+          <a:lstStyle/>
+          <a:p>
+            <a:r>
+              <a:rPr sz="1300" b="1">
+                <a:solidFill>
+                  <a:srgbClr val="2CC5AD"/>
+                </a:solidFill>
+                <a:latin typeface="Calibri"/>
+              </a:rPr>
+              <a:t>THE APPROACH</a:t>
+            </a:r>
+          </a:p>
+        </p:txBody>
+      </p:sp>
+      <p:sp>
+        <p:nvSpPr>
+          <p:cNvPr id="5" name="TextBox 4"/>
+          <p:cNvSpPr txBox="1"/>
+          <p:nvPr/>
+        </p:nvSpPr>
+        <p:spPr>
+          <a:xfrm>
+            <a:off x="10607040" y="502920"/>
+            <a:ext cx="1097280" cy="365760"/>
+          </a:xfrm>
+          <a:prstGeom prst="rect">
+            <a:avLst/>
+          </a:prstGeom>
+          <a:noFill/>
+        </p:spPr>
+        <p:txBody>
+          <a:bodyPr wrap="square">
+            <a:spAutoFit/>
+          </a:bodyPr>
+          <a:lstStyle/>
+          <a:p>
+            <a:r>
+              <a:rPr sz="1600" b="1">
+                <a:solidFill>
+                  <a:srgbClr val="F3F6FA"/>
+                </a:solidFill>
+                <a:latin typeface="Calibri"/>
+              </a:rPr>
+              <a:t>CLM</a:t>
+            </a:r>
+          </a:p>
+        </p:txBody>
+      </p:sp>
+      <p:sp>
+        <p:nvSpPr>
+          <p:cNvPr id="6" name="TextBox 5"/>
+          <p:cNvSpPr txBox="1"/>
+          <p:nvPr/>
+        </p:nvSpPr>
+        <p:spPr>
+          <a:xfrm>
+            <a:off x="731520" y="6355080"/>
+            <a:ext cx="1828800" cy="274320"/>
+          </a:xfrm>
+          <a:prstGeom prst="rect">
+            <a:avLst/>
+          </a:prstGeom>
+          <a:noFill/>
+        </p:spPr>
+        <p:txBody>
+          <a:bodyPr wrap="square">
+            <a:spAutoFit/>
+          </a:bodyPr>
+          <a:lstStyle/>
+          <a:p>
+            <a:r>
+              <a:rPr sz="900" b="0">
+                <a:solidFill>
+                  <a:srgbClr val="4D5F7A"/>
+                </a:solidFill>
+                <a:latin typeface="Calibri"/>
+              </a:rPr>
+              <a:t>03 / 10</a:t>
+            </a:r>
+          </a:p>
+        </p:txBody>
+      </p:sp>
+      <p:sp>
+        <p:nvSpPr>
           <p:cNvPr id="7" name="TextBox 6"/>
           <p:cNvSpPr txBox="1"/>
           <p:nvPr/>
         </p:nvSpPr>
         <p:spPr>
           <a:xfrm>
-            <a:off x="731520" y="2423160"/>
-            <a:ext cx="3291840" cy="731520"/>
+            <a:off x="731520" y="914400"/>
+            <a:ext cx="10515600" cy="1463040"/>
           </a:xfrm>
           <a:prstGeom prst="rect">
             <a:avLst/>
@@ -5395,67 +5620,33 @@
           <a:lstStyle/>
           <a:p>
             <a:r>
-              <a:rPr sz="2200" b="1">
-                <a:solidFill>
-                  <a:srgbClr val="10213A"/>
+              <a:rPr sz="4000" b="1">
+                <a:solidFill>
+                  <a:srgbClr val="F3F6FA"/>
                 </a:solidFill>
                 <a:latin typeface="Calibri"/>
               </a:rPr>
-              <a:t>NVIDIA Nemotron reads</a:t>
-            </a:r>
-          </a:p>
-        </p:txBody>
-      </p:sp>
-      <p:sp>
-        <p:nvSpPr>
-          <p:cNvPr id="8" name="TextBox 7"/>
-          <p:cNvSpPr txBox="1"/>
-          <p:nvPr/>
-        </p:nvSpPr>
-        <p:spPr>
-          <a:xfrm>
-            <a:off x="731520" y="3246120"/>
-            <a:ext cx="3291840" cy="1463040"/>
-          </a:xfrm>
-          <a:prstGeom prst="rect">
-            <a:avLst/>
-          </a:prstGeom>
-          <a:noFill/>
-        </p:spPr>
-        <p:txBody>
-          <a:bodyPr wrap="square">
-            <a:spAutoFit/>
-          </a:bodyPr>
-          <a:lstStyle/>
-          <a:p>
-            <a:r>
-              <a:rPr sz="1600" b="0">
-                <a:solidFill>
-                  <a:srgbClr val="5A6476"/>
-                </a:solidFill>
-                <a:latin typeface="Calibri"/>
-              </a:rPr>
-              <a:t>Turns each text into numbers. Never retrained.</a:t>
-            </a:r>
-          </a:p>
-        </p:txBody>
-      </p:sp>
-      <p:sp>
-        <p:nvSpPr>
-          <p:cNvPr id="9" name="Rectangle 8"/>
+              <a:t>A frozen reader, a small learner, one fast answer</a:t>
+            </a:r>
+          </a:p>
+        </p:txBody>
+      </p:sp>
+      <p:sp>
+        <p:nvSpPr>
+          <p:cNvPr id="8" name="Rectangle 7"/>
           <p:cNvSpPr/>
           <p:nvPr/>
         </p:nvSpPr>
         <p:spPr>
           <a:xfrm>
-            <a:off x="4343400" y="2240280"/>
+            <a:off x="731520" y="2240280"/>
             <a:ext cx="3291840" cy="54864"/>
           </a:xfrm>
           <a:prstGeom prst="rect">
             <a:avLst/>
           </a:prstGeom>
           <a:solidFill>
-            <a:srgbClr val="0F7B6C"/>
+            <a:srgbClr val="2CC5AD"/>
           </a:solidFill>
           <a:ln>
             <a:noFill/>
@@ -5485,14 +5676,48 @@
       </p:sp>
       <p:sp>
         <p:nvSpPr>
+          <p:cNvPr id="9" name="TextBox 8"/>
+          <p:cNvSpPr txBox="1"/>
+          <p:nvPr/>
+        </p:nvSpPr>
+        <p:spPr>
+          <a:xfrm>
+            <a:off x="731520" y="2423160"/>
+            <a:ext cx="3291840" cy="731520"/>
+          </a:xfrm>
+          <a:prstGeom prst="rect">
+            <a:avLst/>
+          </a:prstGeom>
+          <a:noFill/>
+        </p:spPr>
+        <p:txBody>
+          <a:bodyPr wrap="square">
+            <a:spAutoFit/>
+          </a:bodyPr>
+          <a:lstStyle/>
+          <a:p>
+            <a:r>
+              <a:rPr sz="2200" b="1">
+                <a:solidFill>
+                  <a:srgbClr val="F3F6FA"/>
+                </a:solidFill>
+                <a:latin typeface="Calibri"/>
+              </a:rPr>
+              <a:t>NVIDIA Nemotron reads</a:t>
+            </a:r>
+          </a:p>
+        </p:txBody>
+      </p:sp>
+      <p:sp>
+        <p:nvSpPr>
           <p:cNvPr id="10" name="TextBox 9"/>
           <p:cNvSpPr txBox="1"/>
           <p:nvPr/>
         </p:nvSpPr>
         <p:spPr>
           <a:xfrm>
-            <a:off x="4343400" y="2423160"/>
-            <a:ext cx="3291840" cy="731520"/>
+            <a:off x="731520" y="3246120"/>
+            <a:ext cx="3291840" cy="1463040"/>
           </a:xfrm>
           <a:prstGeom prst="rect">
             <a:avLst/>
@@ -5506,67 +5731,33 @@
           <a:lstStyle/>
           <a:p>
             <a:r>
-              <a:rPr sz="2200" b="1">
-                <a:solidFill>
-                  <a:srgbClr val="10213A"/>
+              <a:rPr sz="1600" b="0">
+                <a:solidFill>
+                  <a:srgbClr val="A9B6C8"/>
                 </a:solidFill>
                 <a:latin typeface="Calibri"/>
               </a:rPr>
-              <a:t>A small model learns</a:t>
-            </a:r>
-          </a:p>
-        </p:txBody>
-      </p:sp>
-      <p:sp>
-        <p:nvSpPr>
-          <p:cNvPr id="11" name="TextBox 10"/>
-          <p:cNvSpPr txBox="1"/>
-          <p:nvPr/>
-        </p:nvSpPr>
-        <p:spPr>
-          <a:xfrm>
-            <a:off x="4343400" y="3246120"/>
-            <a:ext cx="3291840" cy="1463040"/>
-          </a:xfrm>
-          <a:prstGeom prst="rect">
-            <a:avLst/>
-          </a:prstGeom>
-          <a:noFill/>
-        </p:spPr>
-        <p:txBody>
-          <a:bodyPr wrap="square">
-            <a:spAutoFit/>
-          </a:bodyPr>
-          <a:lstStyle/>
-          <a:p>
-            <a:r>
-              <a:rPr sz="1600" b="0">
-                <a:solidFill>
-                  <a:srgbClr val="5A6476"/>
-                </a:solidFill>
-                <a:latin typeface="Calibri"/>
-              </a:rPr>
-              <a:t>Our labels, from our examples, in seconds to minutes.</a:t>
-            </a:r>
-          </a:p>
-        </p:txBody>
-      </p:sp>
-      <p:sp>
-        <p:nvSpPr>
-          <p:cNvPr id="12" name="Rectangle 11"/>
+              <a:t>Turns each text into numbers. Never retrained.</a:t>
+            </a:r>
+          </a:p>
+        </p:txBody>
+      </p:sp>
+      <p:sp>
+        <p:nvSpPr>
+          <p:cNvPr id="11" name="Rectangle 10"/>
           <p:cNvSpPr/>
           <p:nvPr/>
         </p:nvSpPr>
         <p:spPr>
           <a:xfrm>
-            <a:off x="7955280" y="2240280"/>
+            <a:off x="4343400" y="2240280"/>
             <a:ext cx="3291840" cy="54864"/>
           </a:xfrm>
           <a:prstGeom prst="rect">
             <a:avLst/>
           </a:prstGeom>
           <a:solidFill>
-            <a:srgbClr val="0F7B6C"/>
+            <a:srgbClr val="2CC5AD"/>
           </a:solidFill>
           <a:ln>
             <a:noFill/>
@@ -5596,14 +5787,48 @@
       </p:sp>
       <p:sp>
         <p:nvSpPr>
+          <p:cNvPr id="12" name="TextBox 11"/>
+          <p:cNvSpPr txBox="1"/>
+          <p:nvPr/>
+        </p:nvSpPr>
+        <p:spPr>
+          <a:xfrm>
+            <a:off x="4343400" y="2423160"/>
+            <a:ext cx="3291840" cy="731520"/>
+          </a:xfrm>
+          <a:prstGeom prst="rect">
+            <a:avLst/>
+          </a:prstGeom>
+          <a:noFill/>
+        </p:spPr>
+        <p:txBody>
+          <a:bodyPr wrap="square">
+            <a:spAutoFit/>
+          </a:bodyPr>
+          <a:lstStyle/>
+          <a:p>
+            <a:r>
+              <a:rPr sz="2200" b="1">
+                <a:solidFill>
+                  <a:srgbClr val="F3F6FA"/>
+                </a:solidFill>
+                <a:latin typeface="Calibri"/>
+              </a:rPr>
+              <a:t>A small model learns</a:t>
+            </a:r>
+          </a:p>
+        </p:txBody>
+      </p:sp>
+      <p:sp>
+        <p:nvSpPr>
           <p:cNvPr id="13" name="TextBox 12"/>
           <p:cNvSpPr txBox="1"/>
           <p:nvPr/>
         </p:nvSpPr>
         <p:spPr>
           <a:xfrm>
-            <a:off x="7955280" y="2423160"/>
-            <a:ext cx="3291840" cy="731520"/>
+            <a:off x="4343400" y="3246120"/>
+            <a:ext cx="3291840" cy="1463040"/>
           </a:xfrm>
           <a:prstGeom prst="rect">
             <a:avLst/>
@@ -5617,9 +5842,86 @@
           <a:lstStyle/>
           <a:p>
             <a:r>
+              <a:rPr sz="1600" b="0">
+                <a:solidFill>
+                  <a:srgbClr val="A9B6C8"/>
+                </a:solidFill>
+                <a:latin typeface="Calibri"/>
+              </a:rPr>
+              <a:t>Our labels, from our examples, in seconds to minutes.</a:t>
+            </a:r>
+          </a:p>
+        </p:txBody>
+      </p:sp>
+      <p:sp>
+        <p:nvSpPr>
+          <p:cNvPr id="14" name="Rectangle 13"/>
+          <p:cNvSpPr/>
+          <p:nvPr/>
+        </p:nvSpPr>
+        <p:spPr>
+          <a:xfrm>
+            <a:off x="7955280" y="2240280"/>
+            <a:ext cx="3291840" cy="54864"/>
+          </a:xfrm>
+          <a:prstGeom prst="rect">
+            <a:avLst/>
+          </a:prstGeom>
+          <a:solidFill>
+            <a:srgbClr val="2CC5AD"/>
+          </a:solidFill>
+          <a:ln>
+            <a:noFill/>
+          </a:ln>
+        </p:spPr>
+        <p:style>
+          <a:lnRef idx="1">
+            <a:schemeClr val="accent1"/>
+          </a:lnRef>
+          <a:fillRef idx="3">
+            <a:schemeClr val="accent1"/>
+          </a:fillRef>
+          <a:effectRef idx="2">
+            <a:schemeClr val="accent1"/>
+          </a:effectRef>
+          <a:fontRef idx="minor">
+            <a:schemeClr val="lt1"/>
+          </a:fontRef>
+        </p:style>
+        <p:txBody>
+          <a:bodyPr rtlCol="0" anchor="ctr"/>
+          <a:lstStyle/>
+          <a:p>
+            <a:pPr algn="ctr"/>
+          </a:p>
+        </p:txBody>
+      </p:sp>
+      <p:sp>
+        <p:nvSpPr>
+          <p:cNvPr id="15" name="TextBox 14"/>
+          <p:cNvSpPr txBox="1"/>
+          <p:nvPr/>
+        </p:nvSpPr>
+        <p:spPr>
+          <a:xfrm>
+            <a:off x="7955280" y="2423160"/>
+            <a:ext cx="3291840" cy="731520"/>
+          </a:xfrm>
+          <a:prstGeom prst="rect">
+            <a:avLst/>
+          </a:prstGeom>
+          <a:noFill/>
+        </p:spPr>
+        <p:txBody>
+          <a:bodyPr wrap="square">
+            <a:spAutoFit/>
+          </a:bodyPr>
+          <a:lstStyle/>
+          <a:p>
+            <a:r>
               <a:rPr sz="2200" b="1">
                 <a:solidFill>
-                  <a:srgbClr val="10213A"/>
+                  <a:srgbClr val="F3F6FA"/>
                 </a:solidFill>
                 <a:latin typeface="Calibri"/>
               </a:rPr>
@@ -5630,7 +5932,7 @@
       </p:sp>
       <p:sp>
         <p:nvSpPr>
-          <p:cNvPr id="14" name="TextBox 13"/>
+          <p:cNvPr id="16" name="TextBox 15"/>
           <p:cNvSpPr txBox="1"/>
           <p:nvPr/>
         </p:nvSpPr>
@@ -5653,7 +5955,7 @@
             <a:r>
               <a:rPr sz="1600" b="0">
                 <a:solidFill>
-                  <a:srgbClr val="5A6476"/>
+                  <a:srgbClr val="A9B6C8"/>
                 </a:solidFill>
                 <a:latin typeface="Calibri"/>
               </a:rPr>
@@ -5689,13 +5991,13 @@
         <p:spPr>
           <a:xfrm>
             <a:off x="0" y="0"/>
-            <a:ext cx="109728" cy="6858000"/>
+            <a:ext cx="12191695" cy="6858000"/>
           </a:xfrm>
           <a:prstGeom prst="rect">
             <a:avLst/>
           </a:prstGeom>
           <a:solidFill>
-            <a:srgbClr val="0F7B6C"/>
+            <a:srgbClr val="0C1A30"/>
           </a:solidFill>
           <a:ln>
             <a:noFill/>
@@ -5725,13 +6027,56 @@
       </p:sp>
       <p:sp>
         <p:nvSpPr>
-          <p:cNvPr id="3" name="TextBox 2"/>
+          <p:cNvPr id="3" name="Rectangle 2"/>
+          <p:cNvSpPr/>
+          <p:nvPr/>
+        </p:nvSpPr>
+        <p:spPr>
+          <a:xfrm>
+            <a:off x="731520" y="658368"/>
+            <a:ext cx="320040" cy="36576"/>
+          </a:xfrm>
+          <a:prstGeom prst="rect">
+            <a:avLst/>
+          </a:prstGeom>
+          <a:solidFill>
+            <a:srgbClr val="2CC5AD"/>
+          </a:solidFill>
+          <a:ln>
+            <a:noFill/>
+          </a:ln>
+        </p:spPr>
+        <p:style>
+          <a:lnRef idx="1">
+            <a:schemeClr val="accent1"/>
+          </a:lnRef>
+          <a:fillRef idx="3">
+            <a:schemeClr val="accent1"/>
+          </a:fillRef>
+          <a:effectRef idx="2">
+            <a:schemeClr val="accent1"/>
+          </a:effectRef>
+          <a:fontRef idx="minor">
+            <a:schemeClr val="lt1"/>
+          </a:fontRef>
+        </p:style>
+        <p:txBody>
+          <a:bodyPr rtlCol="0" anchor="ctr"/>
+          <a:lstStyle/>
+          <a:p>
+            <a:pPr algn="ctr"/>
+          </a:p>
+        </p:txBody>
+      </p:sp>
+      <p:sp>
+        <p:nvSpPr>
+          <p:cNvPr id="4" name="TextBox 3"/>
           <p:cNvSpPr txBox="1"/>
           <p:nvPr/>
         </p:nvSpPr>
         <p:spPr>
           <a:xfrm>
-            <a:off x="731520" y="502920"/>
+            <a:off x="1143000" y="502920"/>
             <a:ext cx="8229600" cy="365760"/>
           </a:xfrm>
           <a:prstGeom prst="rect">
@@ -5748,7 +6093,7 @@
             <a:r>
               <a:rPr sz="1300" b="1">
                 <a:solidFill>
-                  <a:srgbClr val="0F7B6C"/>
+                  <a:srgbClr val="2CC5AD"/>
                 </a:solidFill>
                 <a:latin typeface="Calibri"/>
               </a:rPr>
@@ -5759,7 +6104,7 @@
       </p:sp>
       <p:sp>
         <p:nvSpPr>
-          <p:cNvPr id="4" name="TextBox 3"/>
+          <p:cNvPr id="5" name="TextBox 4"/>
           <p:cNvSpPr txBox="1"/>
           <p:nvPr/>
         </p:nvSpPr>
@@ -5782,7 +6127,7 @@
             <a:r>
               <a:rPr sz="1600" b="1">
                 <a:solidFill>
-                  <a:srgbClr val="0F7B6C"/>
+                  <a:srgbClr val="F3F6FA"/>
                 </a:solidFill>
                 <a:latin typeface="Calibri"/>
               </a:rPr>
@@ -5793,14 +6138,14 @@
       </p:sp>
       <p:sp>
         <p:nvSpPr>
-          <p:cNvPr id="5" name="TextBox 4"/>
+          <p:cNvPr id="6" name="TextBox 5"/>
           <p:cNvSpPr txBox="1"/>
           <p:nvPr/>
         </p:nvSpPr>
         <p:spPr>
           <a:xfrm>
-            <a:off x="731520" y="914400"/>
-            <a:ext cx="10515600" cy="1463040"/>
+            <a:off x="731520" y="6355080"/>
+            <a:ext cx="1828800" cy="274320"/>
           </a:xfrm>
           <a:prstGeom prst="rect">
             <a:avLst/>
@@ -5814,9 +6159,43 @@
           <a:lstStyle/>
           <a:p>
             <a:r>
+              <a:rPr sz="900" b="0">
+                <a:solidFill>
+                  <a:srgbClr val="4D5F7A"/>
+                </a:solidFill>
+                <a:latin typeface="Calibri"/>
+              </a:rPr>
+              <a:t>04 / 10</a:t>
+            </a:r>
+          </a:p>
+        </p:txBody>
+      </p:sp>
+      <p:sp>
+        <p:nvSpPr>
+          <p:cNvPr id="7" name="TextBox 6"/>
+          <p:cNvSpPr txBox="1"/>
+          <p:nvPr/>
+        </p:nvSpPr>
+        <p:spPr>
+          <a:xfrm>
+            <a:off x="731520" y="914400"/>
+            <a:ext cx="10515600" cy="1463040"/>
+          </a:xfrm>
+          <a:prstGeom prst="rect">
+            <a:avLst/>
+          </a:prstGeom>
+          <a:noFill/>
+        </p:spPr>
+        <p:txBody>
+          <a:bodyPr wrap="square">
+            <a:spAutoFit/>
+          </a:bodyPr>
+          <a:lstStyle/>
+          <a:p>
+            <a:r>
               <a:rPr sz="4000" b="1">
                 <a:solidFill>
-                  <a:srgbClr val="10213A"/>
+                  <a:srgbClr val="F3F6FA"/>
                 </a:solidFill>
                 <a:latin typeface="Calibri"/>
               </a:rPr>
@@ -5827,7 +6206,7 @@
       </p:sp>
       <p:graphicFrame>
         <p:nvGraphicFramePr>
-          <p:cNvPr id="6" name="Chart 5"/>
+          <p:cNvPr id="8" name="Chart 7"/>
           <p:cNvGraphicFramePr>
             <a:graphicFrameLocks noGrp="1"/>
           </p:cNvGraphicFramePr>
@@ -5845,7 +6224,7 @@
       </p:graphicFrame>
       <p:sp>
         <p:nvSpPr>
-          <p:cNvPr id="7" name="TextBox 6"/>
+          <p:cNvPr id="9" name="TextBox 8"/>
           <p:cNvSpPr txBox="1"/>
           <p:nvPr/>
         </p:nvSpPr>
@@ -5868,11 +6247,11 @@
             <a:r>
               <a:rPr sz="1100" b="0">
                 <a:solidFill>
-                  <a:srgbClr val="5A6476"/>
+                  <a:srgbClr val="A9B6C8"/>
                 </a:solidFill>
                 <a:latin typeface="Calibri"/>
               </a:rPr>
-              <a:t>Support-ticket topics, 5 labels, 100 held-out conversations; 88–96% across 9 training runs (mean 92%). Demo data: synthetic, labelled by a model. Frontier accuracy: measure on our data with Marketing/benchmark/compare_frontier.py.</a:t>
+              <a:t>Support-ticket topics, 5 labels, 100 held-out conversations; 88–96% across 9 training runs (mean 92%). Demo data: synthetic, labelled by a model. Frontier accuracy: measure on our data with Claude Code/tools/compare_frontier.py.</a:t>
             </a:r>
           </a:p>
         </p:txBody>
@@ -5904,13 +6283,13 @@
         <p:spPr>
           <a:xfrm>
             <a:off x="0" y="0"/>
-            <a:ext cx="109728" cy="6858000"/>
+            <a:ext cx="12191695" cy="6858000"/>
           </a:xfrm>
           <a:prstGeom prst="rect">
             <a:avLst/>
           </a:prstGeom>
           <a:solidFill>
-            <a:srgbClr val="0F7B6C"/>
+            <a:srgbClr val="0C1A30"/>
           </a:solidFill>
           <a:ln>
             <a:noFill/>
@@ -5940,13 +6319,56 @@
       </p:sp>
       <p:sp>
         <p:nvSpPr>
-          <p:cNvPr id="3" name="TextBox 2"/>
+          <p:cNvPr id="3" name="Rectangle 2"/>
+          <p:cNvSpPr/>
+          <p:nvPr/>
+        </p:nvSpPr>
+        <p:spPr>
+          <a:xfrm>
+            <a:off x="731520" y="658368"/>
+            <a:ext cx="320040" cy="36576"/>
+          </a:xfrm>
+          <a:prstGeom prst="rect">
+            <a:avLst/>
+          </a:prstGeom>
+          <a:solidFill>
+            <a:srgbClr val="2CC5AD"/>
+          </a:solidFill>
+          <a:ln>
+            <a:noFill/>
+          </a:ln>
+        </p:spPr>
+        <p:style>
+          <a:lnRef idx="1">
+            <a:schemeClr val="accent1"/>
+          </a:lnRef>
+          <a:fillRef idx="3">
+            <a:schemeClr val="accent1"/>
+          </a:fillRef>
+          <a:effectRef idx="2">
+            <a:schemeClr val="accent1"/>
+          </a:effectRef>
+          <a:fontRef idx="minor">
+            <a:schemeClr val="lt1"/>
+          </a:fontRef>
+        </p:style>
+        <p:txBody>
+          <a:bodyPr rtlCol="0" anchor="ctr"/>
+          <a:lstStyle/>
+          <a:p>
+            <a:pPr algn="ctr"/>
+          </a:p>
+        </p:txBody>
+      </p:sp>
+      <p:sp>
+        <p:nvSpPr>
+          <p:cNvPr id="4" name="TextBox 3"/>
           <p:cNvSpPr txBox="1"/>
           <p:nvPr/>
         </p:nvSpPr>
         <p:spPr>
           <a:xfrm>
-            <a:off x="731520" y="502920"/>
+            <a:off x="1143000" y="502920"/>
             <a:ext cx="8229600" cy="365760"/>
           </a:xfrm>
           <a:prstGeom prst="rect">
@@ -5963,7 +6385,7 @@
             <a:r>
               <a:rPr sz="1300" b="1">
                 <a:solidFill>
-                  <a:srgbClr val="0F7B6C"/>
+                  <a:srgbClr val="2CC5AD"/>
                 </a:solidFill>
                 <a:latin typeface="Calibri"/>
               </a:rPr>
@@ -5974,7 +6396,7 @@
       </p:sp>
       <p:sp>
         <p:nvSpPr>
-          <p:cNvPr id="4" name="TextBox 3"/>
+          <p:cNvPr id="5" name="TextBox 4"/>
           <p:cNvSpPr txBox="1"/>
           <p:nvPr/>
         </p:nvSpPr>
@@ -5997,7 +6419,7 @@
             <a:r>
               <a:rPr sz="1600" b="1">
                 <a:solidFill>
-                  <a:srgbClr val="0F7B6C"/>
+                  <a:srgbClr val="F3F6FA"/>
                 </a:solidFill>
                 <a:latin typeface="Calibri"/>
               </a:rPr>
@@ -6008,14 +6430,14 @@
       </p:sp>
       <p:sp>
         <p:nvSpPr>
-          <p:cNvPr id="5" name="TextBox 4"/>
+          <p:cNvPr id="6" name="TextBox 5"/>
           <p:cNvSpPr txBox="1"/>
           <p:nvPr/>
         </p:nvSpPr>
         <p:spPr>
           <a:xfrm>
-            <a:off x="731520" y="1097280"/>
-            <a:ext cx="10058400" cy="1645920"/>
+            <a:off x="731520" y="6355080"/>
+            <a:ext cx="1828800" cy="274320"/>
           </a:xfrm>
           <a:prstGeom prst="rect">
             <a:avLst/>
@@ -6029,9 +6451,43 @@
           <a:lstStyle/>
           <a:p>
             <a:r>
+              <a:rPr sz="900" b="0">
+                <a:solidFill>
+                  <a:srgbClr val="4D5F7A"/>
+                </a:solidFill>
+                <a:latin typeface="Calibri"/>
+              </a:rPr>
+              <a:t>05 / 10</a:t>
+            </a:r>
+          </a:p>
+        </p:txBody>
+      </p:sp>
+      <p:sp>
+        <p:nvSpPr>
+          <p:cNvPr id="7" name="TextBox 6"/>
+          <p:cNvSpPr txBox="1"/>
+          <p:nvPr/>
+        </p:nvSpPr>
+        <p:spPr>
+          <a:xfrm>
+            <a:off x="731520" y="1097280"/>
+            <a:ext cx="10058400" cy="1645920"/>
+          </a:xfrm>
+          <a:prstGeom prst="rect">
+            <a:avLst/>
+          </a:prstGeom>
+          <a:noFill/>
+        </p:spPr>
+        <p:txBody>
+          <a:bodyPr wrap="square">
+            <a:spAutoFit/>
+          </a:bodyPr>
+          <a:lstStyle/>
+          <a:p>
+            <a:r>
               <a:rPr sz="9600" b="1">
                 <a:solidFill>
-                  <a:srgbClr val="0F7B6C"/>
+                  <a:srgbClr val="2CC5AD"/>
                 </a:solidFill>
                 <a:latin typeface="Calibri"/>
               </a:rPr>
@@ -6042,7 +6498,7 @@
       </p:sp>
       <p:sp>
         <p:nvSpPr>
-          <p:cNvPr id="6" name="TextBox 5"/>
+          <p:cNvPr id="8" name="TextBox 7"/>
           <p:cNvSpPr txBox="1"/>
           <p:nvPr/>
         </p:nvSpPr>
@@ -6065,7 +6521,7 @@
             <a:r>
               <a:rPr sz="2000" b="0">
                 <a:solidFill>
-                  <a:srgbClr val="5A6476"/>
+                  <a:srgbClr val="A9B6C8"/>
                 </a:solidFill>
                 <a:latin typeface="Calibri"/>
               </a:rPr>
@@ -6076,7 +6532,7 @@
       </p:sp>
       <p:sp>
         <p:nvSpPr>
-          <p:cNvPr id="7" name="TextBox 6"/>
+          <p:cNvPr id="9" name="TextBox 8"/>
           <p:cNvSpPr txBox="1"/>
           <p:nvPr/>
         </p:nvSpPr>
@@ -6099,7 +6555,7 @@
             <a:r>
               <a:rPr sz="2200" b="0">
                 <a:solidFill>
-                  <a:srgbClr val="10213A"/>
+                  <a:srgbClr val="F3F6FA"/>
                 </a:solidFill>
                 <a:latin typeface="Calibri"/>
               </a:rPr>
@@ -6115,7 +6571,7 @@
             <a:r>
               <a:rPr sz="2200">
                 <a:solidFill>
-                  <a:srgbClr val="10213A"/>
+                  <a:srgbClr val="F3F6FA"/>
                 </a:solidFill>
                 <a:latin typeface="Calibri"/>
               </a:rPr>
@@ -6131,7 +6587,7 @@
             <a:r>
               <a:rPr sz="2200">
                 <a:solidFill>
-                  <a:srgbClr val="10213A"/>
+                  <a:srgbClr val="F3F6FA"/>
                 </a:solidFill>
                 <a:latin typeface="Calibri"/>
               </a:rPr>
@@ -6142,7 +6598,7 @@
       </p:sp>
       <p:sp>
         <p:nvSpPr>
-          <p:cNvPr id="8" name="TextBox 7"/>
+          <p:cNvPr id="10" name="TextBox 9"/>
           <p:cNvSpPr txBox="1"/>
           <p:nvPr/>
         </p:nvSpPr>
@@ -6165,7 +6621,7 @@
             <a:r>
               <a:rPr sz="1100" b="0">
                 <a:solidFill>
-                  <a:srgbClr val="5A6476"/>
+                  <a:srgbClr val="A9B6C8"/>
                 </a:solidFill>
                 <a:latin typeface="Calibri"/>
               </a:rPr>
@@ -6201,13 +6657,13 @@
         <p:spPr>
           <a:xfrm>
             <a:off x="0" y="0"/>
-            <a:ext cx="109728" cy="6858000"/>
+            <a:ext cx="12191695" cy="6858000"/>
           </a:xfrm>
           <a:prstGeom prst="rect">
             <a:avLst/>
           </a:prstGeom>
           <a:solidFill>
-            <a:srgbClr val="0F7B6C"/>
+            <a:srgbClr val="0C1A30"/>
           </a:solidFill>
           <a:ln>
             <a:noFill/>
@@ -6237,13 +6693,56 @@
       </p:sp>
       <p:sp>
         <p:nvSpPr>
-          <p:cNvPr id="3" name="TextBox 2"/>
+          <p:cNvPr id="3" name="Rectangle 2"/>
+          <p:cNvSpPr/>
+          <p:nvPr/>
+        </p:nvSpPr>
+        <p:spPr>
+          <a:xfrm>
+            <a:off x="731520" y="658368"/>
+            <a:ext cx="320040" cy="36576"/>
+          </a:xfrm>
+          <a:prstGeom prst="rect">
+            <a:avLst/>
+          </a:prstGeom>
+          <a:solidFill>
+            <a:srgbClr val="2CC5AD"/>
+          </a:solidFill>
+          <a:ln>
+            <a:noFill/>
+          </a:ln>
+        </p:spPr>
+        <p:style>
+          <a:lnRef idx="1">
+            <a:schemeClr val="accent1"/>
+          </a:lnRef>
+          <a:fillRef idx="3">
+            <a:schemeClr val="accent1"/>
+          </a:fillRef>
+          <a:effectRef idx="2">
+            <a:schemeClr val="accent1"/>
+          </a:effectRef>
+          <a:fontRef idx="minor">
+            <a:schemeClr val="lt1"/>
+          </a:fontRef>
+        </p:style>
+        <p:txBody>
+          <a:bodyPr rtlCol="0" anchor="ctr"/>
+          <a:lstStyle/>
+          <a:p>
+            <a:pPr algn="ctr"/>
+          </a:p>
+        </p:txBody>
+      </p:sp>
+      <p:sp>
+        <p:nvSpPr>
+          <p:cNvPr id="4" name="TextBox 3"/>
           <p:cNvSpPr txBox="1"/>
           <p:nvPr/>
         </p:nvSpPr>
         <p:spPr>
           <a:xfrm>
-            <a:off x="731520" y="502920"/>
+            <a:off x="1143000" y="502920"/>
             <a:ext cx="8229600" cy="365760"/>
           </a:xfrm>
           <a:prstGeom prst="rect">
@@ -6260,7 +6759,7 @@
             <a:r>
               <a:rPr sz="1300" b="1">
                 <a:solidFill>
-                  <a:srgbClr val="0F7B6C"/>
+                  <a:srgbClr val="2CC5AD"/>
                 </a:solidFill>
                 <a:latin typeface="Calibri"/>
               </a:rPr>
@@ -6271,7 +6770,7 @@
       </p:sp>
       <p:sp>
         <p:nvSpPr>
-          <p:cNvPr id="4" name="TextBox 3"/>
+          <p:cNvPr id="5" name="TextBox 4"/>
           <p:cNvSpPr txBox="1"/>
           <p:nvPr/>
         </p:nvSpPr>
@@ -6294,7 +6793,7 @@
             <a:r>
               <a:rPr sz="1600" b="1">
                 <a:solidFill>
-                  <a:srgbClr val="0F7B6C"/>
+                  <a:srgbClr val="F3F6FA"/>
                 </a:solidFill>
                 <a:latin typeface="Calibri"/>
               </a:rPr>
@@ -6305,14 +6804,14 @@
       </p:sp>
       <p:sp>
         <p:nvSpPr>
-          <p:cNvPr id="5" name="TextBox 4"/>
+          <p:cNvPr id="6" name="TextBox 5"/>
           <p:cNvSpPr txBox="1"/>
           <p:nvPr/>
         </p:nvSpPr>
         <p:spPr>
           <a:xfrm>
-            <a:off x="731520" y="914400"/>
-            <a:ext cx="10515600" cy="1463040"/>
+            <a:off x="731520" y="6355080"/>
+            <a:ext cx="1828800" cy="274320"/>
           </a:xfrm>
           <a:prstGeom prst="rect">
             <a:avLst/>
@@ -6326,9 +6825,43 @@
           <a:lstStyle/>
           <a:p>
             <a:r>
+              <a:rPr sz="900" b="0">
+                <a:solidFill>
+                  <a:srgbClr val="4D5F7A"/>
+                </a:solidFill>
+                <a:latin typeface="Calibri"/>
+              </a:rPr>
+              <a:t>06 / 10</a:t>
+            </a:r>
+          </a:p>
+        </p:txBody>
+      </p:sp>
+      <p:sp>
+        <p:nvSpPr>
+          <p:cNvPr id="7" name="TextBox 6"/>
+          <p:cNvSpPr txBox="1"/>
+          <p:nvPr/>
+        </p:nvSpPr>
+        <p:spPr>
+          <a:xfrm>
+            <a:off x="731520" y="914400"/>
+            <a:ext cx="10515600" cy="1463040"/>
+          </a:xfrm>
+          <a:prstGeom prst="rect">
+            <a:avLst/>
+          </a:prstGeom>
+          <a:noFill/>
+        </p:spPr>
+        <p:txBody>
+          <a:bodyPr wrap="square">
+            <a:spAutoFit/>
+          </a:bodyPr>
+          <a:lstStyle/>
+          <a:p>
+            <a:r>
               <a:rPr sz="4000" b="1">
                 <a:solidFill>
-                  <a:srgbClr val="10213A"/>
+                  <a:srgbClr val="F3F6FA"/>
                 </a:solidFill>
                 <a:latin typeface="Calibri"/>
               </a:rPr>
@@ -6339,7 +6872,7 @@
       </p:sp>
       <p:graphicFrame>
         <p:nvGraphicFramePr>
-          <p:cNvPr id="6" name="Chart 5"/>
+          <p:cNvPr id="8" name="Chart 7"/>
           <p:cNvGraphicFramePr>
             <a:graphicFrameLocks noGrp="1"/>
           </p:cNvGraphicFramePr>
@@ -6357,7 +6890,7 @@
       </p:graphicFrame>
       <p:sp>
         <p:nvSpPr>
-          <p:cNvPr id="7" name="TextBox 6"/>
+          <p:cNvPr id="9" name="TextBox 8"/>
           <p:cNvSpPr txBox="1"/>
           <p:nvPr/>
         </p:nvSpPr>
@@ -6380,7 +6913,7 @@
             <a:r>
               <a:rPr sz="1100" b="0">
                 <a:solidFill>
-                  <a:srgbClr val="5A6476"/>
+                  <a:srgbClr val="A9B6C8"/>
                 </a:solidFill>
                 <a:latin typeface="Calibri"/>
               </a:rPr>
@@ -6416,13 +6949,13 @@
         <p:spPr>
           <a:xfrm>
             <a:off x="0" y="0"/>
-            <a:ext cx="109728" cy="6858000"/>
+            <a:ext cx="12191695" cy="6858000"/>
           </a:xfrm>
           <a:prstGeom prst="rect">
             <a:avLst/>
           </a:prstGeom>
           <a:solidFill>
-            <a:srgbClr val="0F7B6C"/>
+            <a:srgbClr val="0C1A30"/>
           </a:solidFill>
           <a:ln>
             <a:noFill/>
@@ -6452,13 +6985,56 @@
       </p:sp>
       <p:sp>
         <p:nvSpPr>
-          <p:cNvPr id="3" name="TextBox 2"/>
+          <p:cNvPr id="3" name="Rectangle 2"/>
+          <p:cNvSpPr/>
+          <p:nvPr/>
+        </p:nvSpPr>
+        <p:spPr>
+          <a:xfrm>
+            <a:off x="731520" y="658368"/>
+            <a:ext cx="320040" cy="36576"/>
+          </a:xfrm>
+          <a:prstGeom prst="rect">
+            <a:avLst/>
+          </a:prstGeom>
+          <a:solidFill>
+            <a:srgbClr val="2CC5AD"/>
+          </a:solidFill>
+          <a:ln>
+            <a:noFill/>
+          </a:ln>
+        </p:spPr>
+        <p:style>
+          <a:lnRef idx="1">
+            <a:schemeClr val="accent1"/>
+          </a:lnRef>
+          <a:fillRef idx="3">
+            <a:schemeClr val="accent1"/>
+          </a:fillRef>
+          <a:effectRef idx="2">
+            <a:schemeClr val="accent1"/>
+          </a:effectRef>
+          <a:fontRef idx="minor">
+            <a:schemeClr val="lt1"/>
+          </a:fontRef>
+        </p:style>
+        <p:txBody>
+          <a:bodyPr rtlCol="0" anchor="ctr"/>
+          <a:lstStyle/>
+          <a:p>
+            <a:pPr algn="ctr"/>
+          </a:p>
+        </p:txBody>
+      </p:sp>
+      <p:sp>
+        <p:nvSpPr>
+          <p:cNvPr id="4" name="TextBox 3"/>
           <p:cNvSpPr txBox="1"/>
           <p:nvPr/>
         </p:nvSpPr>
         <p:spPr>
           <a:xfrm>
-            <a:off x="731520" y="502920"/>
+            <a:off x="1143000" y="502920"/>
             <a:ext cx="8229600" cy="365760"/>
           </a:xfrm>
           <a:prstGeom prst="rect">
@@ -6475,7 +7051,7 @@
             <a:r>
               <a:rPr sz="1300" b="1">
                 <a:solidFill>
-                  <a:srgbClr val="0F7B6C"/>
+                  <a:srgbClr val="2CC5AD"/>
                 </a:solidFill>
                 <a:latin typeface="Calibri"/>
               </a:rPr>
@@ -6486,7 +7062,7 @@
       </p:sp>
       <p:sp>
         <p:nvSpPr>
-          <p:cNvPr id="4" name="TextBox 3"/>
+          <p:cNvPr id="5" name="TextBox 4"/>
           <p:cNvSpPr txBox="1"/>
           <p:nvPr/>
         </p:nvSpPr>
@@ -6509,7 +7085,7 @@
             <a:r>
               <a:rPr sz="1600" b="1">
                 <a:solidFill>
-                  <a:srgbClr val="0F7B6C"/>
+                  <a:srgbClr val="F3F6FA"/>
                 </a:solidFill>
                 <a:latin typeface="Calibri"/>
               </a:rPr>
@@ -6520,14 +7096,14 @@
       </p:sp>
       <p:sp>
         <p:nvSpPr>
-          <p:cNvPr id="5" name="TextBox 4"/>
+          <p:cNvPr id="6" name="TextBox 5"/>
           <p:cNvSpPr txBox="1"/>
           <p:nvPr/>
         </p:nvSpPr>
         <p:spPr>
           <a:xfrm>
-            <a:off x="731520" y="914400"/>
-            <a:ext cx="10515600" cy="1463040"/>
+            <a:off x="731520" y="6355080"/>
+            <a:ext cx="1828800" cy="274320"/>
           </a:xfrm>
           <a:prstGeom prst="rect">
             <a:avLst/>
@@ -6541,9 +7117,43 @@
           <a:lstStyle/>
           <a:p>
             <a:r>
+              <a:rPr sz="900" b="0">
+                <a:solidFill>
+                  <a:srgbClr val="4D5F7A"/>
+                </a:solidFill>
+                <a:latin typeface="Calibri"/>
+              </a:rPr>
+              <a:t>07 / 10</a:t>
+            </a:r>
+          </a:p>
+        </p:txBody>
+      </p:sp>
+      <p:sp>
+        <p:nvSpPr>
+          <p:cNvPr id="7" name="TextBox 6"/>
+          <p:cNvSpPr txBox="1"/>
+          <p:nvPr/>
+        </p:nvSpPr>
+        <p:spPr>
+          <a:xfrm>
+            <a:off x="731520" y="914400"/>
+            <a:ext cx="10515600" cy="1463040"/>
+          </a:xfrm>
+          <a:prstGeom prst="rect">
+            <a:avLst/>
+          </a:prstGeom>
+          <a:noFill/>
+        </p:spPr>
+        <p:txBody>
+          <a:bodyPr wrap="square">
+            <a:spAutoFit/>
+          </a:bodyPr>
+          <a:lstStyle/>
+          <a:p>
+            <a:r>
               <a:rPr sz="4000" b="1">
                 <a:solidFill>
-                  <a:srgbClr val="10213A"/>
+                  <a:srgbClr val="F3F6FA"/>
                 </a:solidFill>
                 <a:latin typeface="Calibri"/>
               </a:rPr>
@@ -6554,7 +7164,7 @@
       </p:sp>
       <p:sp>
         <p:nvSpPr>
-          <p:cNvPr id="6" name="TextBox 5"/>
+          <p:cNvPr id="8" name="TextBox 7"/>
           <p:cNvSpPr txBox="1"/>
           <p:nvPr/>
         </p:nvSpPr>
@@ -6577,7 +7187,7 @@
             <a:r>
               <a:rPr sz="2400" b="0">
                 <a:solidFill>
-                  <a:srgbClr val="10213A"/>
+                  <a:srgbClr val="F3F6FA"/>
                 </a:solidFill>
                 <a:latin typeface="Calibri"/>
               </a:rPr>
@@ -6593,7 +7203,7 @@
             <a:r>
               <a:rPr sz="2400">
                 <a:solidFill>
-                  <a:srgbClr val="10213A"/>
+                  <a:srgbClr val="F3F6FA"/>
                 </a:solidFill>
                 <a:latin typeface="Calibri"/>
               </a:rPr>
@@ -6609,11 +7219,11 @@
             <a:r>
               <a:rPr sz="2400">
                 <a:solidFill>
-                  <a:srgbClr val="10213A"/>
+                  <a:srgbClr val="F3F6FA"/>
                 </a:solidFill>
                 <a:latin typeface="Calibri"/>
               </a:rPr>
-              <a:t>• Verified, versioned model files; a full governance pack in the repo</a:t>
+              <a:t>• Verified, versioned model files; export to disk or S3 with checksums</a:t>
             </a:r>
           </a:p>
           <a:p>
@@ -6625,7 +7235,7 @@
             <a:r>
               <a:rPr sz="2400">
                 <a:solidFill>
-                  <a:srgbClr val="10213A"/>
+                  <a:srgbClr val="F3F6FA"/>
                 </a:solidFill>
                 <a:latin typeface="Calibri"/>
               </a:rPr>
@@ -6661,13 +7271,13 @@
         <p:spPr>
           <a:xfrm>
             <a:off x="0" y="0"/>
-            <a:ext cx="109728" cy="6858000"/>
+            <a:ext cx="12191695" cy="6858000"/>
           </a:xfrm>
           <a:prstGeom prst="rect">
             <a:avLst/>
           </a:prstGeom>
           <a:solidFill>
-            <a:srgbClr val="0F7B6C"/>
+            <a:srgbClr val="0C1A30"/>
           </a:solidFill>
           <a:ln>
             <a:noFill/>
@@ -6697,13 +7307,56 @@
       </p:sp>
       <p:sp>
         <p:nvSpPr>
-          <p:cNvPr id="3" name="TextBox 2"/>
+          <p:cNvPr id="3" name="Rectangle 2"/>
+          <p:cNvSpPr/>
+          <p:nvPr/>
+        </p:nvSpPr>
+        <p:spPr>
+          <a:xfrm>
+            <a:off x="731520" y="658368"/>
+            <a:ext cx="320040" cy="36576"/>
+          </a:xfrm>
+          <a:prstGeom prst="rect">
+            <a:avLst/>
+          </a:prstGeom>
+          <a:solidFill>
+            <a:srgbClr val="2CC5AD"/>
+          </a:solidFill>
+          <a:ln>
+            <a:noFill/>
+          </a:ln>
+        </p:spPr>
+        <p:style>
+          <a:lnRef idx="1">
+            <a:schemeClr val="accent1"/>
+          </a:lnRef>
+          <a:fillRef idx="3">
+            <a:schemeClr val="accent1"/>
+          </a:fillRef>
+          <a:effectRef idx="2">
+            <a:schemeClr val="accent1"/>
+          </a:effectRef>
+          <a:fontRef idx="minor">
+            <a:schemeClr val="lt1"/>
+          </a:fontRef>
+        </p:style>
+        <p:txBody>
+          <a:bodyPr rtlCol="0" anchor="ctr"/>
+          <a:lstStyle/>
+          <a:p>
+            <a:pPr algn="ctr"/>
+          </a:p>
+        </p:txBody>
+      </p:sp>
+      <p:sp>
+        <p:nvSpPr>
+          <p:cNvPr id="4" name="TextBox 3"/>
           <p:cNvSpPr txBox="1"/>
           <p:nvPr/>
         </p:nvSpPr>
         <p:spPr>
           <a:xfrm>
-            <a:off x="731520" y="502920"/>
+            <a:off x="1143000" y="502920"/>
             <a:ext cx="8229600" cy="365760"/>
           </a:xfrm>
           <a:prstGeom prst="rect">
@@ -6720,7 +7373,7 @@
             <a:r>
               <a:rPr sz="1300" b="1">
                 <a:solidFill>
-                  <a:srgbClr val="0F7B6C"/>
+                  <a:srgbClr val="2CC5AD"/>
                 </a:solidFill>
                 <a:latin typeface="Calibri"/>
               </a:rPr>
@@ -6731,7 +7384,7 @@
       </p:sp>
       <p:sp>
         <p:nvSpPr>
-          <p:cNvPr id="4" name="TextBox 3"/>
+          <p:cNvPr id="5" name="TextBox 4"/>
           <p:cNvSpPr txBox="1"/>
           <p:nvPr/>
         </p:nvSpPr>
@@ -6754,7 +7407,7 @@
             <a:r>
               <a:rPr sz="1600" b="1">
                 <a:solidFill>
-                  <a:srgbClr val="0F7B6C"/>
+                  <a:srgbClr val="F3F6FA"/>
                 </a:solidFill>
                 <a:latin typeface="Calibri"/>
               </a:rPr>
@@ -6765,14 +7418,14 @@
       </p:sp>
       <p:sp>
         <p:nvSpPr>
-          <p:cNvPr id="5" name="TextBox 4"/>
+          <p:cNvPr id="6" name="TextBox 5"/>
           <p:cNvSpPr txBox="1"/>
           <p:nvPr/>
         </p:nvSpPr>
         <p:spPr>
           <a:xfrm>
-            <a:off x="731520" y="914400"/>
-            <a:ext cx="10515600" cy="1463040"/>
+            <a:off x="731520" y="6355080"/>
+            <a:ext cx="1828800" cy="274320"/>
           </a:xfrm>
           <a:prstGeom prst="rect">
             <a:avLst/>
@@ -6786,9 +7439,43 @@
           <a:lstStyle/>
           <a:p>
             <a:r>
+              <a:rPr sz="900" b="0">
+                <a:solidFill>
+                  <a:srgbClr val="4D5F7A"/>
+                </a:solidFill>
+                <a:latin typeface="Calibri"/>
+              </a:rPr>
+              <a:t>08 / 10</a:t>
+            </a:r>
+          </a:p>
+        </p:txBody>
+      </p:sp>
+      <p:sp>
+        <p:nvSpPr>
+          <p:cNvPr id="7" name="TextBox 6"/>
+          <p:cNvSpPr txBox="1"/>
+          <p:nvPr/>
+        </p:nvSpPr>
+        <p:spPr>
+          <a:xfrm>
+            <a:off x="731520" y="914400"/>
+            <a:ext cx="10515600" cy="1463040"/>
+          </a:xfrm>
+          <a:prstGeom prst="rect">
+            <a:avLst/>
+          </a:prstGeom>
+          <a:noFill/>
+        </p:spPr>
+        <p:txBody>
+          <a:bodyPr wrap="square">
+            <a:spAutoFit/>
+          </a:bodyPr>
+          <a:lstStyle/>
+          <a:p>
+            <a:r>
               <a:rPr sz="4000" b="1">
                 <a:solidFill>
-                  <a:srgbClr val="10213A"/>
+                  <a:srgbClr val="F3F6FA"/>
                 </a:solidFill>
                 <a:latin typeface="Calibri"/>
               </a:rPr>
@@ -6799,7 +7486,7 @@
       </p:sp>
       <p:graphicFrame>
         <p:nvGraphicFramePr>
-          <p:cNvPr id="6" name="Table 5"/>
+          <p:cNvPr id="8" name="Table 7"/>
           <p:cNvGraphicFramePr>
             <a:graphicFrameLocks noGrp="1"/>
           </p:cNvGraphicFramePr>
@@ -6829,7 +7516,7 @@
                   </a:txBody>
                   <a:tcPr>
                     <a:solidFill>
-                      <a:srgbClr val="F4F6F9"/>
+                      <a:srgbClr val="15284A"/>
                     </a:solidFill>
                   </a:tcPr>
                 </a:tc>
@@ -6841,7 +7528,7 @@
                       <a:r>
                         <a:rPr sz="1400" b="1">
                           <a:solidFill>
-                            <a:srgbClr val="10213A"/>
+                            <a:srgbClr val="A9B6C8"/>
                           </a:solidFill>
                           <a:latin typeface="Calibri"/>
                         </a:rPr>
@@ -6851,7 +7538,7 @@
                   </a:txBody>
                   <a:tcPr>
                     <a:solidFill>
-                      <a:srgbClr val="F4F6F9"/>
+                      <a:srgbClr val="15284A"/>
                     </a:solidFill>
                   </a:tcPr>
                 </a:tc>
@@ -6863,7 +7550,7 @@
                       <a:r>
                         <a:rPr sz="1400" b="1">
                           <a:solidFill>
-                            <a:srgbClr val="10213A"/>
+                            <a:srgbClr val="A9B6C8"/>
                           </a:solidFill>
                           <a:latin typeface="Calibri"/>
                         </a:rPr>
@@ -6873,7 +7560,7 @@
                   </a:txBody>
                   <a:tcPr>
                     <a:solidFill>
-                      <a:srgbClr val="F4F6F9"/>
+                      <a:srgbClr val="15284A"/>
                     </a:solidFill>
                   </a:tcPr>
                 </a:tc>
@@ -6887,7 +7574,7 @@
                       <a:r>
                         <a:rPr sz="1600" b="0">
                           <a:solidFill>
-                            <a:srgbClr val="10213A"/>
+                            <a:srgbClr val="F3F6FA"/>
                           </a:solidFill>
                           <a:latin typeface="Calibri"/>
                         </a:rPr>
@@ -6897,7 +7584,7 @@
                   </a:txBody>
                   <a:tcPr>
                     <a:solidFill>
-                      <a:srgbClr val="FFFFFF"/>
+                      <a:srgbClr val="0C1A30"/>
                     </a:solidFill>
                   </a:tcPr>
                 </a:tc>
@@ -6909,7 +7596,7 @@
                       <a:r>
                         <a:rPr sz="1600" b="1">
                           <a:solidFill>
-                            <a:srgbClr val="0F7B6C"/>
+                            <a:srgbClr val="2CC5AD"/>
                           </a:solidFill>
                           <a:latin typeface="Calibri"/>
                         </a:rPr>
@@ -6919,7 +7606,7 @@
                   </a:txBody>
                   <a:tcPr>
                     <a:solidFill>
-                      <a:srgbClr val="FFFFFF"/>
+                      <a:srgbClr val="0C1A30"/>
                     </a:solidFill>
                   </a:tcPr>
                 </a:tc>
@@ -6931,7 +7618,7 @@
                       <a:r>
                         <a:rPr sz="1600" b="0">
                           <a:solidFill>
-                            <a:srgbClr val="10213A"/>
+                            <a:srgbClr val="F3F6FA"/>
                           </a:solidFill>
                           <a:latin typeface="Calibri"/>
                         </a:rPr>
@@ -6941,7 +7628,7 @@
                   </a:txBody>
                   <a:tcPr>
                     <a:solidFill>
-                      <a:srgbClr val="FFFFFF"/>
+                      <a:srgbClr val="0C1A30"/>
                     </a:solidFill>
                   </a:tcPr>
                 </a:tc>
@@ -6955,7 +7642,7 @@
                       <a:r>
                         <a:rPr sz="1600" b="0">
                           <a:solidFill>
-                            <a:srgbClr val="10213A"/>
+                            <a:srgbClr val="F3F6FA"/>
                           </a:solidFill>
                           <a:latin typeface="Calibri"/>
                         </a:rPr>
@@ -6965,7 +7652,7 @@
                   </a:txBody>
                   <a:tcPr>
                     <a:solidFill>
-                      <a:srgbClr val="FFFFFF"/>
+                      <a:srgbClr val="0C1A30"/>
                     </a:solidFill>
                   </a:tcPr>
                 </a:tc>
@@ -6977,7 +7664,7 @@
                       <a:r>
                         <a:rPr sz="1600" b="1">
                           <a:solidFill>
-                            <a:srgbClr val="0F7B6C"/>
+                            <a:srgbClr val="2CC5AD"/>
                           </a:solidFill>
                           <a:latin typeface="Calibri"/>
                         </a:rPr>
@@ -6987,7 +7674,7 @@
                   </a:txBody>
                   <a:tcPr>
                     <a:solidFill>
-                      <a:srgbClr val="FFFFFF"/>
+                      <a:srgbClr val="0C1A30"/>
                     </a:solidFill>
                   </a:tcPr>
                 </a:tc>
@@ -6999,7 +7686,7 @@
                       <a:r>
                         <a:rPr sz="1600" b="0">
                           <a:solidFill>
-                            <a:srgbClr val="10213A"/>
+                            <a:srgbClr val="F3F6FA"/>
                           </a:solidFill>
                           <a:latin typeface="Calibri"/>
                         </a:rPr>
@@ -7009,7 +7696,7 @@
                   </a:txBody>
                   <a:tcPr>
                     <a:solidFill>
-                      <a:srgbClr val="FFFFFF"/>
+                      <a:srgbClr val="0C1A30"/>
                     </a:solidFill>
                   </a:tcPr>
                 </a:tc>
@@ -7023,7 +7710,7 @@
                       <a:r>
                         <a:rPr sz="1600" b="0">
                           <a:solidFill>
-                            <a:srgbClr val="10213A"/>
+                            <a:srgbClr val="F3F6FA"/>
                           </a:solidFill>
                           <a:latin typeface="Calibri"/>
                         </a:rPr>
@@ -7033,7 +7720,7 @@
                   </a:txBody>
                   <a:tcPr>
                     <a:solidFill>
-                      <a:srgbClr val="FFFFFF"/>
+                      <a:srgbClr val="0C1A30"/>
                     </a:solidFill>
                   </a:tcPr>
                 </a:tc>
@@ -7045,7 +7732,7 @@
                       <a:r>
                         <a:rPr sz="1600" b="1">
                           <a:solidFill>
-                            <a:srgbClr val="0F7B6C"/>
+                            <a:srgbClr val="2CC5AD"/>
                           </a:solidFill>
                           <a:latin typeface="Calibri"/>
                         </a:rPr>
@@ -7055,7 +7742,7 @@
                   </a:txBody>
                   <a:tcPr>
                     <a:solidFill>
-                      <a:srgbClr val="FFFFFF"/>
+                      <a:srgbClr val="0C1A30"/>
                     </a:solidFill>
                   </a:tcPr>
                 </a:tc>
@@ -7067,7 +7754,7 @@
                       <a:r>
                         <a:rPr sz="1600" b="0">
                           <a:solidFill>
-                            <a:srgbClr val="10213A"/>
+                            <a:srgbClr val="F3F6FA"/>
                           </a:solidFill>
                           <a:latin typeface="Calibri"/>
                         </a:rPr>
@@ -7077,7 +7764,7 @@
                   </a:txBody>
                   <a:tcPr>
                     <a:solidFill>
-                      <a:srgbClr val="FFFFFF"/>
+                      <a:srgbClr val="0C1A30"/>
                     </a:solidFill>
                   </a:tcPr>
                 </a:tc>
@@ -7091,7 +7778,7 @@
                       <a:r>
                         <a:rPr sz="1600" b="0">
                           <a:solidFill>
-                            <a:srgbClr val="10213A"/>
+                            <a:srgbClr val="F3F6FA"/>
                           </a:solidFill>
                           <a:latin typeface="Calibri"/>
                         </a:rPr>
@@ -7101,7 +7788,7 @@
                   </a:txBody>
                   <a:tcPr>
                     <a:solidFill>
-                      <a:srgbClr val="FFFFFF"/>
+                      <a:srgbClr val="0C1A30"/>
                     </a:solidFill>
                   </a:tcPr>
                 </a:tc>
@@ -7113,7 +7800,7 @@
                       <a:r>
                         <a:rPr sz="1600" b="1">
                           <a:solidFill>
-                            <a:srgbClr val="0F7B6C"/>
+                            <a:srgbClr val="2CC5AD"/>
                           </a:solidFill>
                           <a:latin typeface="Calibri"/>
                         </a:rPr>
@@ -7123,7 +7810,7 @@
                   </a:txBody>
                   <a:tcPr>
                     <a:solidFill>
-                      <a:srgbClr val="FFFFFF"/>
+                      <a:srgbClr val="0C1A30"/>
                     </a:solidFill>
                   </a:tcPr>
                 </a:tc>
@@ -7135,7 +7822,7 @@
                       <a:r>
                         <a:rPr sz="1600" b="0">
                           <a:solidFill>
-                            <a:srgbClr val="10213A"/>
+                            <a:srgbClr val="F3F6FA"/>
                           </a:solidFill>
                           <a:latin typeface="Calibri"/>
                         </a:rPr>
@@ -7145,7 +7832,7 @@
                   </a:txBody>
                   <a:tcPr>
                     <a:solidFill>
-                      <a:srgbClr val="FFFFFF"/>
+                      <a:srgbClr val="0C1A30"/>
                     </a:solidFill>
                   </a:tcPr>
                 </a:tc>
@@ -7159,7 +7846,7 @@
                       <a:r>
                         <a:rPr sz="1600" b="0">
                           <a:solidFill>
-                            <a:srgbClr val="10213A"/>
+                            <a:srgbClr val="F3F6FA"/>
                           </a:solidFill>
                           <a:latin typeface="Calibri"/>
                         </a:rPr>
@@ -7169,7 +7856,7 @@
                   </a:txBody>
                   <a:tcPr>
                     <a:solidFill>
-                      <a:srgbClr val="FFFFFF"/>
+                      <a:srgbClr val="0C1A30"/>
                     </a:solidFill>
                   </a:tcPr>
                 </a:tc>
@@ -7181,7 +7868,7 @@
                       <a:r>
                         <a:rPr sz="1600" b="1">
                           <a:solidFill>
-                            <a:srgbClr val="D9622B"/>
+                            <a:srgbClr val="F0A04B"/>
                           </a:solidFill>
                           <a:latin typeface="Calibri"/>
                         </a:rPr>
@@ -7191,7 +7878,7 @@
                   </a:txBody>
                   <a:tcPr>
                     <a:solidFill>
-                      <a:srgbClr val="FFFFFF"/>
+                      <a:srgbClr val="0C1A30"/>
                     </a:solidFill>
                   </a:tcPr>
                 </a:tc>
@@ -7203,7 +7890,7 @@
                       <a:r>
                         <a:rPr sz="1600" b="1">
                           <a:solidFill>
-                            <a:srgbClr val="0F7B6C"/>
+                            <a:srgbClr val="2CC5AD"/>
                           </a:solidFill>
                           <a:latin typeface="Calibri"/>
                         </a:rPr>
@@ -7213,7 +7900,7 @@
                   </a:txBody>
                   <a:tcPr>
                     <a:solidFill>
-                      <a:srgbClr val="FFFFFF"/>
+                      <a:srgbClr val="0C1A30"/>
                     </a:solidFill>
                   </a:tcPr>
                 </a:tc>
@@ -7227,7 +7914,7 @@
                       <a:r>
                         <a:rPr sz="1600" b="0">
                           <a:solidFill>
-                            <a:srgbClr val="10213A"/>
+                            <a:srgbClr val="F3F6FA"/>
                           </a:solidFill>
                           <a:latin typeface="Calibri"/>
                         </a:rPr>
@@ -7237,7 +7924,7 @@
                   </a:txBody>
                   <a:tcPr>
                     <a:solidFill>
-                      <a:srgbClr val="FFFFFF"/>
+                      <a:srgbClr val="0C1A30"/>
                     </a:solidFill>
                   </a:tcPr>
                 </a:tc>
@@ -7249,7 +7936,7 @@
                       <a:r>
                         <a:rPr sz="1600" b="1">
                           <a:solidFill>
-                            <a:srgbClr val="D9622B"/>
+                            <a:srgbClr val="F0A04B"/>
                           </a:solidFill>
                           <a:latin typeface="Calibri"/>
                         </a:rPr>
@@ -7259,7 +7946,7 @@
                   </a:txBody>
                   <a:tcPr>
                     <a:solidFill>
-                      <a:srgbClr val="FFFFFF"/>
+                      <a:srgbClr val="0C1A30"/>
                     </a:solidFill>
                   </a:tcPr>
                 </a:tc>
@@ -7271,7 +7958,7 @@
                       <a:r>
                         <a:rPr sz="1600" b="1">
                           <a:solidFill>
-                            <a:srgbClr val="0F7B6C"/>
+                            <a:srgbClr val="2CC5AD"/>
                           </a:solidFill>
                           <a:latin typeface="Calibri"/>
                         </a:rPr>
@@ -7281,7 +7968,7 @@
                   </a:txBody>
                   <a:tcPr>
                     <a:solidFill>
-                      <a:srgbClr val="FFFFFF"/>
+                      <a:srgbClr val="0C1A30"/>
                     </a:solidFill>
                   </a:tcPr>
                 </a:tc>
@@ -7292,7 +7979,7 @@
       </p:graphicFrame>
       <p:sp>
         <p:nvSpPr>
-          <p:cNvPr id="7" name="TextBox 6"/>
+          <p:cNvPr id="9" name="TextBox 8"/>
           <p:cNvSpPr txBox="1"/>
           <p:nvPr/>
         </p:nvSpPr>
@@ -7315,7 +8002,7 @@
             <a:r>
               <a:rPr sz="1100" b="0">
                 <a:solidFill>
-                  <a:srgbClr val="5A6476"/>
+                  <a:srgbClr val="A9B6C8"/>
                 </a:solidFill>
                 <a:latin typeface="Calibri"/>
               </a:rPr>
@@ -7351,13 +8038,13 @@
         <p:spPr>
           <a:xfrm>
             <a:off x="0" y="0"/>
-            <a:ext cx="109728" cy="6858000"/>
+            <a:ext cx="12191695" cy="6858000"/>
           </a:xfrm>
           <a:prstGeom prst="rect">
             <a:avLst/>
           </a:prstGeom>
           <a:solidFill>
-            <a:srgbClr val="0F7B6C"/>
+            <a:srgbClr val="0C1A30"/>
           </a:solidFill>
           <a:ln>
             <a:noFill/>
@@ -7387,122 +8074,20 @@
       </p:sp>
       <p:sp>
         <p:nvSpPr>
-          <p:cNvPr id="3" name="TextBox 2"/>
-          <p:cNvSpPr txBox="1"/>
-          <p:nvPr/>
-        </p:nvSpPr>
-        <p:spPr>
-          <a:xfrm>
-            <a:off x="731520" y="502920"/>
-            <a:ext cx="8229600" cy="365760"/>
-          </a:xfrm>
-          <a:prstGeom prst="rect">
-            <a:avLst/>
-          </a:prstGeom>
-          <a:noFill/>
-        </p:spPr>
-        <p:txBody>
-          <a:bodyPr wrap="square">
-            <a:spAutoFit/>
-          </a:bodyPr>
-          <a:lstStyle/>
-          <a:p>
-            <a:r>
-              <a:rPr sz="1300" b="1">
-                <a:solidFill>
-                  <a:srgbClr val="0F7B6C"/>
-                </a:solidFill>
-                <a:latin typeface="Calibri"/>
-              </a:rPr>
-              <a:t>WHAT IT TAKES</a:t>
-            </a:r>
-          </a:p>
-        </p:txBody>
-      </p:sp>
-      <p:sp>
-        <p:nvSpPr>
-          <p:cNvPr id="4" name="TextBox 3"/>
-          <p:cNvSpPr txBox="1"/>
-          <p:nvPr/>
-        </p:nvSpPr>
-        <p:spPr>
-          <a:xfrm>
-            <a:off x="10607040" y="502920"/>
-            <a:ext cx="1097280" cy="365760"/>
-          </a:xfrm>
-          <a:prstGeom prst="rect">
-            <a:avLst/>
-          </a:prstGeom>
-          <a:noFill/>
-        </p:spPr>
-        <p:txBody>
-          <a:bodyPr wrap="square">
-            <a:spAutoFit/>
-          </a:bodyPr>
-          <a:lstStyle/>
-          <a:p>
-            <a:r>
-              <a:rPr sz="1600" b="1">
-                <a:solidFill>
-                  <a:srgbClr val="0F7B6C"/>
-                </a:solidFill>
-                <a:latin typeface="Calibri"/>
-              </a:rPr>
-              <a:t>CLM</a:t>
-            </a:r>
-          </a:p>
-        </p:txBody>
-      </p:sp>
-      <p:sp>
-        <p:nvSpPr>
-          <p:cNvPr id="5" name="TextBox 4"/>
-          <p:cNvSpPr txBox="1"/>
-          <p:nvPr/>
-        </p:nvSpPr>
-        <p:spPr>
-          <a:xfrm>
-            <a:off x="731520" y="914400"/>
-            <a:ext cx="10515600" cy="1463040"/>
-          </a:xfrm>
-          <a:prstGeom prst="rect">
-            <a:avLst/>
-          </a:prstGeom>
-          <a:noFill/>
-        </p:spPr>
-        <p:txBody>
-          <a:bodyPr wrap="square">
-            <a:spAutoFit/>
-          </a:bodyPr>
-          <a:lstStyle/>
-          <a:p>
-            <a:r>
-              <a:rPr sz="4000" b="1">
-                <a:solidFill>
-                  <a:srgbClr val="10213A"/>
-                </a:solidFill>
-                <a:latin typeface="Calibri"/>
-              </a:rPr>
-              <a:t>Days, not quarters</a:t>
-            </a:r>
-          </a:p>
-        </p:txBody>
-      </p:sp>
-      <p:sp>
-        <p:nvSpPr>
-          <p:cNvPr id="6" name="Rectangle 5"/>
+          <p:cNvPr id="3" name="Rectangle 2"/>
           <p:cNvSpPr/>
           <p:nvPr/>
         </p:nvSpPr>
         <p:spPr>
           <a:xfrm>
-            <a:off x="731520" y="2240280"/>
-            <a:ext cx="3291840" cy="54864"/>
+            <a:off x="731520" y="658368"/>
+            <a:ext cx="320040" cy="36576"/>
           </a:xfrm>
           <a:prstGeom prst="rect">
             <a:avLst/>
           </a:prstGeom>
           <a:solidFill>
-            <a:srgbClr val="0F7B6C"/>
+            <a:srgbClr val="2CC5AD"/>
           </a:solidFill>
           <a:ln>
             <a:noFill/>
@@ -7532,14 +8117,116 @@
       </p:sp>
       <p:sp>
         <p:nvSpPr>
+          <p:cNvPr id="4" name="TextBox 3"/>
+          <p:cNvSpPr txBox="1"/>
+          <p:nvPr/>
+        </p:nvSpPr>
+        <p:spPr>
+          <a:xfrm>
+            <a:off x="1143000" y="502920"/>
+            <a:ext cx="8229600" cy="365760"/>
+          </a:xfrm>
+          <a:prstGeom prst="rect">
+            <a:avLst/>
+          </a:prstGeom>
+          <a:noFill/>
+        </p:spPr>
+        <p:txBody>
+          <a:bodyPr wrap="square">
+            <a:spAutoFit/>
+          </a:bodyPr>
+          <a:lstStyle/>
+          <a:p>
+            <a:r>
+              <a:rPr sz="1300" b="1">
+                <a:solidFill>
+                  <a:srgbClr val="2CC5AD"/>
+                </a:solidFill>
+                <a:latin typeface="Calibri"/>
+              </a:rPr>
+              <a:t>WHAT IT TAKES</a:t>
+            </a:r>
+          </a:p>
+        </p:txBody>
+      </p:sp>
+      <p:sp>
+        <p:nvSpPr>
+          <p:cNvPr id="5" name="TextBox 4"/>
+          <p:cNvSpPr txBox="1"/>
+          <p:nvPr/>
+        </p:nvSpPr>
+        <p:spPr>
+          <a:xfrm>
+            <a:off x="10607040" y="502920"/>
+            <a:ext cx="1097280" cy="365760"/>
+          </a:xfrm>
+          <a:prstGeom prst="rect">
+            <a:avLst/>
+          </a:prstGeom>
+          <a:noFill/>
+        </p:spPr>
+        <p:txBody>
+          <a:bodyPr wrap="square">
+            <a:spAutoFit/>
+          </a:bodyPr>
+          <a:lstStyle/>
+          <a:p>
+            <a:r>
+              <a:rPr sz="1600" b="1">
+                <a:solidFill>
+                  <a:srgbClr val="F3F6FA"/>
+                </a:solidFill>
+                <a:latin typeface="Calibri"/>
+              </a:rPr>
+              <a:t>CLM</a:t>
+            </a:r>
+          </a:p>
+        </p:txBody>
+      </p:sp>
+      <p:sp>
+        <p:nvSpPr>
+          <p:cNvPr id="6" name="TextBox 5"/>
+          <p:cNvSpPr txBox="1"/>
+          <p:nvPr/>
+        </p:nvSpPr>
+        <p:spPr>
+          <a:xfrm>
+            <a:off x="731520" y="6355080"/>
+            <a:ext cx="1828800" cy="274320"/>
+          </a:xfrm>
+          <a:prstGeom prst="rect">
+            <a:avLst/>
+          </a:prstGeom>
+          <a:noFill/>
+        </p:spPr>
+        <p:txBody>
+          <a:bodyPr wrap="square">
+            <a:spAutoFit/>
+          </a:bodyPr>
+          <a:lstStyle/>
+          <a:p>
+            <a:r>
+              <a:rPr sz="900" b="0">
+                <a:solidFill>
+                  <a:srgbClr val="4D5F7A"/>
+                </a:solidFill>
+                <a:latin typeface="Calibri"/>
+              </a:rPr>
+              <a:t>09 / 10</a:t>
+            </a:r>
+          </a:p>
+        </p:txBody>
+      </p:sp>
+      <p:sp>
+        <p:nvSpPr>
           <p:cNvPr id="7" name="TextBox 6"/>
           <p:cNvSpPr txBox="1"/>
           <p:nvPr/>
         </p:nvSpPr>
         <p:spPr>
           <a:xfrm>
-            <a:off x="731520" y="2423160"/>
-            <a:ext cx="3291840" cy="731520"/>
+            <a:off x="731520" y="914400"/>
+            <a:ext cx="10515600" cy="1463040"/>
           </a:xfrm>
           <a:prstGeom prst="rect">
             <a:avLst/>
@@ -7553,67 +8240,33 @@
           <a:lstStyle/>
           <a:p>
             <a:r>
-              <a:rPr sz="2200" b="1">
-                <a:solidFill>
-                  <a:srgbClr val="10213A"/>
+              <a:rPr sz="4000" b="1">
+                <a:solidFill>
+                  <a:srgbClr val="F3F6FA"/>
                 </a:solidFill>
                 <a:latin typeface="Calibri"/>
               </a:rPr>
-              <a:t>300+ labelled examples</a:t>
-            </a:r>
-          </a:p>
-        </p:txBody>
-      </p:sp>
-      <p:sp>
-        <p:nvSpPr>
-          <p:cNvPr id="8" name="TextBox 7"/>
-          <p:cNvSpPr txBox="1"/>
-          <p:nvPr/>
-        </p:nvSpPr>
-        <p:spPr>
-          <a:xfrm>
-            <a:off x="731520" y="3246120"/>
-            <a:ext cx="3291840" cy="1463040"/>
-          </a:xfrm>
-          <a:prstGeom prst="rect">
-            <a:avLst/>
-          </a:prstGeom>
-          <a:noFill/>
-        </p:spPr>
-        <p:txBody>
-          <a:bodyPr wrap="square">
-            <a:spAutoFit/>
-          </a:bodyPr>
-          <a:lstStyle/>
-          <a:p>
-            <a:r>
-              <a:rPr sz="1600" b="0">
-                <a:solidFill>
-                  <a:srgbClr val="5A6476"/>
-                </a:solidFill>
-                <a:latin typeface="Calibri"/>
-              </a:rPr>
-              <a:t>Exported from the system that already handles the work.</a:t>
-            </a:r>
-          </a:p>
-        </p:txBody>
-      </p:sp>
-      <p:sp>
-        <p:nvSpPr>
-          <p:cNvPr id="9" name="Rectangle 8"/>
+              <a:t>Days, not quarters</a:t>
+            </a:r>
+          </a:p>
+        </p:txBody>
+      </p:sp>
+      <p:sp>
+        <p:nvSpPr>
+          <p:cNvPr id="8" name="Rectangle 7"/>
           <p:cNvSpPr/>
           <p:nvPr/>
         </p:nvSpPr>
         <p:spPr>
           <a:xfrm>
-            <a:off x="4343400" y="2240280"/>
+            <a:off x="731520" y="2240280"/>
             <a:ext cx="3291840" cy="54864"/>
           </a:xfrm>
           <a:prstGeom prst="rect">
             <a:avLst/>
           </a:prstGeom>
           <a:solidFill>
-            <a:srgbClr val="0F7B6C"/>
+            <a:srgbClr val="2CC5AD"/>
           </a:solidFill>
           <a:ln>
             <a:noFill/>
@@ -7643,14 +8296,48 @@
       </p:sp>
       <p:sp>
         <p:nvSpPr>
+          <p:cNvPr id="9" name="TextBox 8"/>
+          <p:cNvSpPr txBox="1"/>
+          <p:nvPr/>
+        </p:nvSpPr>
+        <p:spPr>
+          <a:xfrm>
+            <a:off x="731520" y="2423160"/>
+            <a:ext cx="3291840" cy="731520"/>
+          </a:xfrm>
+          <a:prstGeom prst="rect">
+            <a:avLst/>
+          </a:prstGeom>
+          <a:noFill/>
+        </p:spPr>
+        <p:txBody>
+          <a:bodyPr wrap="square">
+            <a:spAutoFit/>
+          </a:bodyPr>
+          <a:lstStyle/>
+          <a:p>
+            <a:r>
+              <a:rPr sz="2200" b="1">
+                <a:solidFill>
+                  <a:srgbClr val="F3F6FA"/>
+                </a:solidFill>
+                <a:latin typeface="Calibri"/>
+              </a:rPr>
+              <a:t>300+ labelled examples</a:t>
+            </a:r>
+          </a:p>
+        </p:txBody>
+      </p:sp>
+      <p:sp>
+        <p:nvSpPr>
           <p:cNvPr id="10" name="TextBox 9"/>
           <p:cNvSpPr txBox="1"/>
           <p:nvPr/>
         </p:nvSpPr>
         <p:spPr>
           <a:xfrm>
-            <a:off x="4343400" y="2423160"/>
-            <a:ext cx="3291840" cy="731520"/>
+            <a:off x="731520" y="3246120"/>
+            <a:ext cx="3291840" cy="1463040"/>
           </a:xfrm>
           <a:prstGeom prst="rect">
             <a:avLst/>
@@ -7664,67 +8351,33 @@
           <a:lstStyle/>
           <a:p>
             <a:r>
-              <a:rPr sz="2200" b="1">
-                <a:solidFill>
-                  <a:srgbClr val="10213A"/>
+              <a:rPr sz="1600" b="0">
+                <a:solidFill>
+                  <a:srgbClr val="A9B6C8"/>
                 </a:solidFill>
                 <a:latin typeface="Calibri"/>
               </a:rPr>
-              <a:t>Minutes to train</a:t>
-            </a:r>
-          </a:p>
-        </p:txBody>
-      </p:sp>
-      <p:sp>
-        <p:nvSpPr>
-          <p:cNvPr id="11" name="TextBox 10"/>
-          <p:cNvSpPr txBox="1"/>
-          <p:nvPr/>
-        </p:nvSpPr>
-        <p:spPr>
-          <a:xfrm>
-            <a:off x="4343400" y="3246120"/>
-            <a:ext cx="3291840" cy="1463040"/>
-          </a:xfrm>
-          <a:prstGeom prst="rect">
-            <a:avLst/>
-          </a:prstGeom>
-          <a:noFill/>
-        </p:spPr>
-        <p:txBody>
-          <a:bodyPr wrap="square">
-            <a:spAutoFit/>
-          </a:bodyPr>
-          <a:lstStyle/>
-          <a:p>
-            <a:r>
-              <a:rPr sz="1600" b="0">
-                <a:solidFill>
-                  <a:srgbClr val="5A6476"/>
-                </a:solidFill>
-                <a:latin typeface="Calibri"/>
-              </a:rPr>
-              <a:t>In a browser: upload, describe the labels, train, test.</a:t>
-            </a:r>
-          </a:p>
-        </p:txBody>
-      </p:sp>
-      <p:sp>
-        <p:nvSpPr>
-          <p:cNvPr id="12" name="Rectangle 11"/>
+              <a:t>Exported from the system that already handles the work.</a:t>
+            </a:r>
+          </a:p>
+        </p:txBody>
+      </p:sp>
+      <p:sp>
+        <p:nvSpPr>
+          <p:cNvPr id="11" name="Rectangle 10"/>
           <p:cNvSpPr/>
           <p:nvPr/>
         </p:nvSpPr>
         <p:spPr>
           <a:xfrm>
-            <a:off x="7955280" y="2240280"/>
+            <a:off x="4343400" y="2240280"/>
             <a:ext cx="3291840" cy="54864"/>
           </a:xfrm>
           <a:prstGeom prst="rect">
             <a:avLst/>
           </a:prstGeom>
           <a:solidFill>
-            <a:srgbClr val="0F7B6C"/>
+            <a:srgbClr val="2CC5AD"/>
           </a:solidFill>
           <a:ln>
             <a:noFill/>
@@ -7754,14 +8407,48 @@
       </p:sp>
       <p:sp>
         <p:nvSpPr>
+          <p:cNvPr id="12" name="TextBox 11"/>
+          <p:cNvSpPr txBox="1"/>
+          <p:nvPr/>
+        </p:nvSpPr>
+        <p:spPr>
+          <a:xfrm>
+            <a:off x="4343400" y="2423160"/>
+            <a:ext cx="3291840" cy="731520"/>
+          </a:xfrm>
+          <a:prstGeom prst="rect">
+            <a:avLst/>
+          </a:prstGeom>
+          <a:noFill/>
+        </p:spPr>
+        <p:txBody>
+          <a:bodyPr wrap="square">
+            <a:spAutoFit/>
+          </a:bodyPr>
+          <a:lstStyle/>
+          <a:p>
+            <a:r>
+              <a:rPr sz="2200" b="1">
+                <a:solidFill>
+                  <a:srgbClr val="F3F6FA"/>
+                </a:solidFill>
+                <a:latin typeface="Calibri"/>
+              </a:rPr>
+              <a:t>Minutes to train</a:t>
+            </a:r>
+          </a:p>
+        </p:txBody>
+      </p:sp>
+      <p:sp>
+        <p:nvSpPr>
           <p:cNvPr id="13" name="TextBox 12"/>
           <p:cNvSpPr txBox="1"/>
           <p:nvPr/>
         </p:nvSpPr>
         <p:spPr>
           <a:xfrm>
-            <a:off x="7955280" y="2423160"/>
-            <a:ext cx="3291840" cy="731520"/>
+            <a:off x="4343400" y="3246120"/>
+            <a:ext cx="3291840" cy="1463040"/>
           </a:xfrm>
           <a:prstGeom prst="rect">
             <a:avLst/>
@@ -7775,9 +8462,86 @@
           <a:lstStyle/>
           <a:p>
             <a:r>
+              <a:rPr sz="1600" b="0">
+                <a:solidFill>
+                  <a:srgbClr val="A9B6C8"/>
+                </a:solidFill>
+                <a:latin typeface="Calibri"/>
+              </a:rPr>
+              <a:t>In a browser: upload, describe the labels, train, test.</a:t>
+            </a:r>
+          </a:p>
+        </p:txBody>
+      </p:sp>
+      <p:sp>
+        <p:nvSpPr>
+          <p:cNvPr id="14" name="Rectangle 13"/>
+          <p:cNvSpPr/>
+          <p:nvPr/>
+        </p:nvSpPr>
+        <p:spPr>
+          <a:xfrm>
+            <a:off x="7955280" y="2240280"/>
+            <a:ext cx="3291840" cy="54864"/>
+          </a:xfrm>
+          <a:prstGeom prst="rect">
+            <a:avLst/>
+          </a:prstGeom>
+          <a:solidFill>
+            <a:srgbClr val="2CC5AD"/>
+          </a:solidFill>
+          <a:ln>
+            <a:noFill/>
+          </a:ln>
+        </p:spPr>
+        <p:style>
+          <a:lnRef idx="1">
+            <a:schemeClr val="accent1"/>
+          </a:lnRef>
+          <a:fillRef idx="3">
+            <a:schemeClr val="accent1"/>
+          </a:fillRef>
+          <a:effectRef idx="2">
+            <a:schemeClr val="accent1"/>
+          </a:effectRef>
+          <a:fontRef idx="minor">
+            <a:schemeClr val="lt1"/>
+          </a:fontRef>
+        </p:style>
+        <p:txBody>
+          <a:bodyPr rtlCol="0" anchor="ctr"/>
+          <a:lstStyle/>
+          <a:p>
+            <a:pPr algn="ctr"/>
+          </a:p>
+        </p:txBody>
+      </p:sp>
+      <p:sp>
+        <p:nvSpPr>
+          <p:cNvPr id="15" name="TextBox 14"/>
+          <p:cNvSpPr txBox="1"/>
+          <p:nvPr/>
+        </p:nvSpPr>
+        <p:spPr>
+          <a:xfrm>
+            <a:off x="7955280" y="2423160"/>
+            <a:ext cx="3291840" cy="731520"/>
+          </a:xfrm>
+          <a:prstGeom prst="rect">
+            <a:avLst/>
+          </a:prstGeom>
+          <a:noFill/>
+        </p:spPr>
+        <p:txBody>
+          <a:bodyPr wrap="square">
+            <a:spAutoFit/>
+          </a:bodyPr>
+          <a:lstStyle/>
+          <a:p>
+            <a:r>
               <a:rPr sz="2200" b="1">
                 <a:solidFill>
-                  <a:srgbClr val="10213A"/>
+                  <a:srgbClr val="F3F6FA"/>
                 </a:solidFill>
                 <a:latin typeface="Calibri"/>
               </a:rPr>
@@ -7788,7 +8552,7 @@
       </p:sp>
       <p:sp>
         <p:nvSpPr>
-          <p:cNvPr id="14" name="TextBox 13"/>
+          <p:cNvPr id="16" name="TextBox 15"/>
           <p:cNvSpPr txBox="1"/>
           <p:nvPr/>
         </p:nvSpPr>
@@ -7811,7 +8575,7 @@
             <a:r>
               <a:rPr sz="1600" b="0">
                 <a:solidFill>
-                  <a:srgbClr val="5A6476"/>
+                  <a:srgbClr val="A9B6C8"/>
                 </a:solidFill>
                 <a:latin typeface="Calibri"/>
               </a:rPr>
@@ -7822,7 +8586,7 @@
       </p:sp>
       <p:sp>
         <p:nvSpPr>
-          <p:cNvPr id="15" name="TextBox 14"/>
+          <p:cNvPr id="17" name="TextBox 16"/>
           <p:cNvSpPr txBox="1"/>
           <p:nvPr/>
         </p:nvSpPr>
@@ -7845,7 +8609,7 @@
             <a:r>
               <a:rPr sz="1100" b="0">
                 <a:solidFill>
-                  <a:srgbClr val="5A6476"/>
+                  <a:srgbClr val="A9B6C8"/>
                 </a:solidFill>
                 <a:latin typeface="Calibri"/>
               </a:rPr>
